--- a/lecture-3/kprf-electorate.pptx
+++ b/lecture-3/kprf-electorate.pptx
@@ -25,6 +25,7 @@
     <p:sldId id="270" r:id="rId17"/>
     <p:sldId id="271" r:id="rId18"/>
     <p:sldId id="272" r:id="rId19"/>
+    <p:sldId id="273" r:id="rId20"/>
   </p:sldIdLst>
   <p:sldSz cx="12192000" cy="6858000"/>
   <p:notesSz cx="6858000" cy="9144000"/>
@@ -132,6 +133,7 @@
             <p14:sldId id="270"/>
             <p14:sldId id="271"/>
             <p14:sldId id="272"/>
+            <p14:sldId id="273"/>
           </p14:sldIdLst>
         </p14:section>
       </p14:sectionLst>
@@ -798,7 +800,7 @@
           <a:p>
             <a:r>
               <a:rPr/>
-              <a:t>Гипотеза проверяема: пять следствий и три опровергающих условия. Ограничение — нет открытых данных по профессиям, поэтому проверяем косвенно: через возраст, район и динамику явки.</a:t>
+              <a:t>Социологическая рамка: сокращение объясняется не сменой убеждений, а сменой поколений. Проверяется декомпозицией на возраст, период и когорту.</a:t>
             </a:r>
           </a:p>
         </p:txBody>
@@ -857,7 +859,7 @@
           <a:p>
             <a:r>
               <a:rPr/>
-              <a:t>Пять наблюдений с участка — это то, что я вижу каждую кампанию: люди те же, молодёжь приходит, но не к КПРФ.</a:t>
+              <a:t>Гипотеза проверяема: пять следствий и три опровергающих условия. Ограничение — нет открытых данных по профессиям, поэтому проверяем косвенно: через возраст, район и динамику явки.</a:t>
             </a:r>
           </a:p>
         </p:txBody>
@@ -871,6 +873,65 @@
 </file>
 
 <file path=ppt/notesSlides/notesSlide17.xml><?xml version="1.0" encoding="utf-8"?>
+<p:notes xmlns:a="http://schemas.openxmlformats.org/drawingml/2006/main" xmlns:r="http://schemas.openxmlformats.org/officeDocument/2006/relationships" xmlns:p="http://schemas.openxmlformats.org/presentationml/2006/main">
+  <p:cSld>
+    <p:spTree>
+      <p:nvGrpSpPr>
+        <p:cNvPr id="1" name=""/>
+        <p:cNvGrpSpPr/>
+        <p:nvPr/>
+      </p:nvGrpSpPr>
+      <p:grpSpPr>
+        <a:xfrm>
+          <a:off x="0" y="0"/>
+          <a:ext cx="0" cy="0"/>
+          <a:chOff x="0" y="0"/>
+          <a:chExt cx="0" cy="0"/>
+        </a:xfrm>
+      </p:grpSpPr>
+      <p:sp>
+        <p:nvSpPr>
+          <p:cNvPr id="2" name="Slide Image Placeholder 1"/>
+          <p:cNvSpPr>
+            <a:spLocks noGrp="1"/>
+          </p:cNvSpPr>
+          <p:nvPr>
+            <p:ph type="sldImg"/>
+          </p:nvPr>
+        </p:nvSpPr>
+        <p:spPr/>
+      </p:sp>
+      <p:sp>
+        <p:nvSpPr>
+          <p:cNvPr id="3" name="Notes Placeholder 2"/>
+          <p:cNvSpPr>
+            <a:spLocks noGrp="1"/>
+          </p:cNvSpPr>
+          <p:nvPr>
+            <p:ph type="body" idx="1"/>
+          </p:nvPr>
+        </p:nvSpPr>
+        <p:spPr/>
+        <p:txBody>
+          <a:bodyPr/>
+          <a:lstStyle/>
+          <a:p>
+            <a:r>
+              <a:rPr/>
+              <a:t>Пять наблюдений с участка — это то, что я вижу каждую кампанию: люди те же, молодёжь приходит, но не к КПРФ.</a:t>
+            </a:r>
+          </a:p>
+        </p:txBody>
+      </p:sp>
+    </p:spTree>
+  </p:cSld>
+  <p:clrMapOvr>
+    <a:masterClrMapping/>
+  </p:clrMapOvr>
+</p:notes>
+</file>
+
+<file path=ppt/notesSlides/notesSlide18.xml><?xml version="1.0" encoding="utf-8"?>
 <p:notes xmlns:a="http://schemas.openxmlformats.org/drawingml/2006/main" xmlns:r="http://schemas.openxmlformats.org/officeDocument/2006/relationships" xmlns:p="http://schemas.openxmlformats.org/presentationml/2006/main">
   <p:cSld>
     <p:spTree>
@@ -4521,7 +4582,7 @@
         <p:spPr>
           <a:xfrm>
             <a:off x="838200" y="3505200"/>
-            <a:ext cx="7620000" cy="923544"/>
+            <a:ext cx="7620000" cy="507492"/>
           </a:xfrm>
           <a:prstGeom prst="rect">
             <a:avLst/>
@@ -4548,39 +4609,8 @@
                 </a:solidFill>
                 <a:latin typeface="Georgia"/>
               </a:rPr>
-              <a:t>Записки члена комиссии:</a:t>
-            </a:r>
-            <a:endParaRPr sz="2100" b="0" i="1" cap="none">
-              <a:solidFill>
-                <a:srgbClr val="D8CDB4"/>
-              </a:solidFill>
-              <a:latin typeface="Georgia"/>
-            </a:endParaRPr>
-          </a:p>
-          <a:p>
-            <a:pPr algn="l">
-              <a:lnSpc>
-                <a:spcPct val="130000"/>
-              </a:lnSpc>
-              <a:spcAft>
-                <a:spcPts val="0"/>
-              </a:spcAft>
-            </a:pPr>
-            <a:r>
-              <a:rPr sz="2100" b="0" i="1" cap="none">
-                <a:solidFill>
-                  <a:srgbClr val="D8CDB4"/>
-                </a:solidFill>
-                <a:latin typeface="Georgia"/>
-              </a:rPr>
-              <a:t>выборы 2024 и 2026</a:t>
-            </a:r>
-            <a:endParaRPr sz="2100" b="0" i="1" cap="none">
-              <a:solidFill>
-                <a:srgbClr val="D8CDB4"/>
-              </a:solidFill>
-              <a:latin typeface="Georgia"/>
-            </a:endParaRPr>
+              <a:t>Выборы 2024 и 2026</a:t>
+            </a:r>
           </a:p>
         </p:txBody>
       </p:sp>
@@ -4592,8 +4622,8 @@
         </p:nvSpPr>
         <p:spPr>
           <a:xfrm>
-            <a:off x="838200" y="4775200"/>
-            <a:ext cx="8890000" cy="310515"/>
+            <a:off x="838200" y="4191000"/>
+            <a:ext cx="8890000" cy="304800"/>
           </a:xfrm>
           <a:prstGeom prst="rect">
             <a:avLst/>
@@ -4639,7 +4669,7 @@
         </p:nvSpPr>
         <p:spPr>
           <a:xfrm>
-            <a:off x="838200" y="5232400"/>
+            <a:off x="838200" y="4724400"/>
             <a:ext cx="2997200" cy="711200"/>
           </a:xfrm>
           <a:prstGeom prst="rect">
@@ -4682,8 +4712,8 @@
         </p:nvSpPr>
         <p:spPr>
           <a:xfrm>
-            <a:off x="990600" y="5334000"/>
-            <a:ext cx="2794000" cy="502920"/>
+            <a:off x="990600" y="4826000"/>
+            <a:ext cx="2794000" cy="508000"/>
           </a:xfrm>
           <a:prstGeom prst="rect">
             <a:avLst/>
@@ -5132,7 +5162,7 @@
                 </a:solidFill>
                 <a:latin typeface="Consolas"/>
               </a:rPr>
-              <a:t>10 / 17</a:t>
+              <a:t>10 / 18</a:t>
             </a:r>
           </a:p>
         </p:txBody>
@@ -6531,7 +6561,7 @@
                 </a:solidFill>
                 <a:latin typeface="Consolas"/>
               </a:rPr>
-              <a:t>11 / 17</a:t>
+              <a:t>11 / 18</a:t>
             </a:r>
           </a:p>
         </p:txBody>
@@ -7713,7 +7743,7 @@
                 </a:solidFill>
                 <a:latin typeface="Consolas"/>
               </a:rPr>
-              <a:t>12 / 17</a:t>
+              <a:t>12 / 18</a:t>
             </a:r>
           </a:p>
         </p:txBody>
@@ -9521,7 +9551,7 @@
                 </a:solidFill>
                 <a:latin typeface="Consolas"/>
               </a:rPr>
-              <a:t>13 / 17</a:t>
+              <a:t>13 / 18</a:t>
             </a:r>
           </a:p>
         </p:txBody>
@@ -10816,14 +10846,8 @@
                 </a:solidFill>
                 <a:latin typeface="Consolas"/>
               </a:rPr>
-              <a:t>14 / 17</a:t>
-            </a:r>
-            <a:endParaRPr sz="900" b="0" i="0" cap="none" spc="140">
-              <a:solidFill>
-                <a:srgbClr val="55503F"/>
-              </a:solidFill>
-              <a:latin typeface="Consolas"/>
-            </a:endParaRPr>
+              <a:t>14 / 18</a:t>
+            </a:r>
           </a:p>
         </p:txBody>
       </p:sp>
@@ -11680,7 +11704,7 @@
       </p:grpSpPr>
       <p:sp>
         <p:nvSpPr>
-          <p:cNvPr id="788" name="Rectangle 1"/>
+          <p:cNvPr id="849" name="Rectangle 1"/>
           <p:cNvSpPr/>
           <p:nvPr/>
         </p:nvSpPr>
@@ -11723,7 +11747,7 @@
       </p:sp>
       <p:sp>
         <p:nvSpPr>
-          <p:cNvPr id="789" name="TextBox 2"/>
+          <p:cNvPr id="850" name="TextBox 2"/>
           <p:cNvSpPr txBox="1"/>
           <p:nvPr/>
         </p:nvSpPr>
@@ -11757,7 +11781,7 @@
                 </a:solidFill>
                 <a:latin typeface="Consolas"/>
               </a:rPr>
-              <a:t>14 / ПРОВЕРКА</a:t>
+              <a:t>14 / ГИПОТЕЗА</a:t>
             </a:r>
             <a:endParaRPr sz="950" b="0" i="0" cap="none" spc="220">
               <a:solidFill>
@@ -11770,7 +11794,7 @@
       </p:sp>
       <p:sp>
         <p:nvSpPr>
-          <p:cNvPr id="790" name="TextBox 3"/>
+          <p:cNvPr id="851" name="TextBox 3"/>
           <p:cNvSpPr txBox="1"/>
           <p:nvPr/>
         </p:nvSpPr>
@@ -11817,14 +11841,14 @@
       </p:sp>
       <p:sp>
         <p:nvSpPr>
-          <p:cNvPr id="791" name="TextBox 4"/>
+          <p:cNvPr id="852" name="TextBox 4"/>
           <p:cNvSpPr txBox="1"/>
           <p:nvPr/>
         </p:nvSpPr>
         <p:spPr>
           <a:xfrm>
             <a:off x="812800" y="635000"/>
-            <a:ext cx="10541000" cy="563880"/>
+            <a:ext cx="10541000" cy="533400"/>
           </a:xfrm>
           <a:prstGeom prst="rect">
             <a:avLst/>
@@ -11845,15 +11869,15 @@
               </a:spcAft>
             </a:pPr>
             <a:r>
-              <a:rPr sz="3100" b="0" i="0" cap="none">
+              <a:rPr sz="2900" b="0" i="0" cap="none">
                 <a:solidFill>
                   <a:srgbClr val="1B1A18"/>
                 </a:solidFill>
                 <a:latin typeface="Bahnschrift SemiBold"/>
               </a:rPr>
-              <a:t>Как проверить гипотезу и что её опровергнет</a:t>
-            </a:r>
-            <a:endParaRPr sz="3100" b="0" i="0" cap="none">
+              <a:t>Исследовательская гипотеза: когортное замещение</a:t>
+            </a:r>
+            <a:endParaRPr sz="2900" b="0" i="0" cap="none">
               <a:solidFill>
                 <a:srgbClr val="1B1A18"/>
               </a:solidFill>
@@ -11864,7 +11888,7 @@
       </p:sp>
       <p:sp>
         <p:nvSpPr>
-          <p:cNvPr id="792" name="Rectangle 5"/>
+          <p:cNvPr id="853" name="Rectangle 5"/>
           <p:cNvSpPr/>
           <p:nvPr/>
         </p:nvSpPr>
@@ -11907,7 +11931,7 @@
       </p:sp>
       <p:sp>
         <p:nvSpPr>
-          <p:cNvPr id="793" name="Rectangle 6"/>
+          <p:cNvPr id="854" name="Rectangle 6"/>
           <p:cNvSpPr/>
           <p:nvPr/>
         </p:nvSpPr>
@@ -11950,7 +11974,7 @@
       </p:sp>
       <p:sp>
         <p:nvSpPr>
-          <p:cNvPr id="795" name="TextBox 8"/>
+          <p:cNvPr id="855" name="TextBox 7"/>
           <p:cNvSpPr txBox="1"/>
           <p:nvPr/>
         </p:nvSpPr>
@@ -11984,7 +12008,7 @@
                 </a:solidFill>
                 <a:latin typeface="Consolas"/>
               </a:rPr>
-              <a:t>15 / 17</a:t>
+              <a:t>15 / 18</a:t>
             </a:r>
             <a:endParaRPr sz="900" b="0" i="0" cap="none" spc="140">
               <a:solidFill>
@@ -11997,14 +12021,14 @@
       </p:sp>
       <p:sp>
         <p:nvSpPr>
-          <p:cNvPr id="796" name="TextBox 9"/>
-          <p:cNvSpPr txBox="1"/>
-          <p:nvPr/>
-        </p:nvSpPr>
-        <p:spPr>
-          <a:xfrm>
-            <a:off x="812800" y="1854200"/>
-            <a:ext cx="5080000" cy="249174"/>
+          <p:cNvPr id="856" name="TextBox 8"/>
+          <p:cNvSpPr txBox="1"/>
+          <p:nvPr/>
+        </p:nvSpPr>
+        <p:spPr>
+          <a:xfrm>
+            <a:off x="812800" y="1778000"/>
+            <a:ext cx="6350000" cy="245669"/>
           </a:xfrm>
           <a:prstGeom prst="rect">
             <a:avLst/>
@@ -12025,15 +12049,15 @@
               </a:spcAft>
             </a:pPr>
             <a:r>
-              <a:rPr sz="900" b="0" i="0" cap="none" spc="200">
+              <a:rPr sz="880" b="0" i="0" cap="none" spc="200">
                 <a:solidFill>
                   <a:srgbClr val="A82C1E"/>
                 </a:solidFill>
                 <a:latin typeface="Consolas"/>
               </a:rPr>
-              <a:t>ЕСЛИ ГИПОТЕЗА ВЕРНА</a:t>
-            </a:r>
-            <a:endParaRPr sz="900" b="0" i="0" cap="none" spc="200">
+              <a:t>ИССЛЕДОВАТЕЛЬСКИЙ ВОПРОС</a:t>
+            </a:r>
+            <a:endParaRPr sz="880" b="0" i="0" cap="none" spc="200">
               <a:solidFill>
                 <a:srgbClr val="A82C1E"/>
               </a:solidFill>
@@ -12044,14 +12068,14 @@
       </p:sp>
       <p:sp>
         <p:nvSpPr>
-          <p:cNvPr id="797" name="TextBox 10"/>
-          <p:cNvSpPr txBox="1"/>
-          <p:nvPr/>
-        </p:nvSpPr>
-        <p:spPr>
-          <a:xfrm>
-            <a:off x="812800" y="2260600"/>
-            <a:ext cx="381000" cy="249174"/>
+          <p:cNvPr id="857" name="TextBox 9"/>
+          <p:cNvSpPr txBox="1"/>
+          <p:nvPr/>
+        </p:nvSpPr>
+        <p:spPr>
+          <a:xfrm>
+            <a:off x="812800" y="2006600"/>
+            <a:ext cx="10972800" cy="336804"/>
           </a:xfrm>
           <a:prstGeom prst="rect">
             <a:avLst/>
@@ -12072,62 +12096,15 @@
               </a:spcAft>
             </a:pPr>
             <a:r>
-              <a:rPr sz="900" b="0" i="0" cap="none">
-                <a:solidFill>
-                  <a:srgbClr val="A82C1E"/>
-                </a:solidFill>
-                <a:latin typeface="Consolas"/>
-              </a:rPr>
-              <a:t>01</a:t>
-            </a:r>
-            <a:endParaRPr sz="900" b="0" i="0" cap="none">
-              <a:solidFill>
-                <a:srgbClr val="A82C1E"/>
-              </a:solidFill>
-              <a:latin typeface="Consolas"/>
-            </a:endParaRPr>
-          </a:p>
-        </p:txBody>
-      </p:sp>
-      <p:sp>
-        <p:nvSpPr>
-          <p:cNvPr id="798" name="TextBox 11"/>
-          <p:cNvSpPr txBox="1"/>
-          <p:nvPr/>
-        </p:nvSpPr>
-        <p:spPr>
-          <a:xfrm>
-            <a:off x="1270000" y="2235200"/>
-            <a:ext cx="4572000" cy="301447"/>
-          </a:xfrm>
-          <a:prstGeom prst="rect">
-            <a:avLst/>
-          </a:prstGeom>
-        </p:spPr>
-        <p:txBody>
-          <a:bodyPr wrap="square">
-            <a:spAutoFit/>
-          </a:bodyPr>
-          <a:lstStyle/>
-          <a:p>
-            <a:pPr algn="l">
-              <a:lnSpc>
-                <a:spcPct val="130000"/>
-              </a:lnSpc>
-              <a:spcAft>
-                <a:spcPts val="0"/>
-              </a:spcAft>
-            </a:pPr>
-            <a:r>
-              <a:rPr sz="1060" b="0" i="0" cap="none">
+              <a:rPr sz="1400" b="0" i="1" cap="none">
                 <a:solidFill>
                   <a:srgbClr val="1B1A18"/>
                 </a:solidFill>
                 <a:latin typeface="Georgia"/>
               </a:rPr>
-              <a:t>Медианный возраст сторонников растёт от кампании к кампании.</a:t>
-            </a:r>
-            <a:endParaRPr sz="1060" b="0" i="0" cap="none">
+              <a:t>Сокращается ли поддержка КПРФ потому, что меняются взгляды, — или потому, что меняются поколения?</a:t>
+            </a:r>
+            <a:endParaRPr sz="1400" b="0" i="1" cap="none">
               <a:solidFill>
                 <a:srgbClr val="1B1A18"/>
               </a:solidFill>
@@ -12138,390 +12115,14 @@
       </p:sp>
       <p:sp>
         <p:nvSpPr>
-          <p:cNvPr id="799" name="TextBox 12"/>
-          <p:cNvSpPr txBox="1"/>
-          <p:nvPr/>
-        </p:nvSpPr>
-        <p:spPr>
-          <a:xfrm>
-            <a:off x="812800" y="2971800"/>
-            <a:ext cx="381000" cy="249174"/>
-          </a:xfrm>
-          <a:prstGeom prst="rect">
-            <a:avLst/>
-          </a:prstGeom>
-        </p:spPr>
-        <p:txBody>
-          <a:bodyPr wrap="square">
-            <a:spAutoFit/>
-          </a:bodyPr>
-          <a:lstStyle/>
-          <a:p>
-            <a:pPr algn="l">
-              <a:lnSpc>
-                <a:spcPct val="115000"/>
-              </a:lnSpc>
-              <a:spcAft>
-                <a:spcPts val="0"/>
-              </a:spcAft>
-            </a:pPr>
-            <a:r>
-              <a:rPr sz="900" b="0" i="0" cap="none">
-                <a:solidFill>
-                  <a:srgbClr val="A82C1E"/>
-                </a:solidFill>
-                <a:latin typeface="Consolas"/>
-              </a:rPr>
-              <a:t>02</a:t>
-            </a:r>
-            <a:endParaRPr sz="900" b="0" i="0" cap="none">
-              <a:solidFill>
-                <a:srgbClr val="A82C1E"/>
-              </a:solidFill>
-              <a:latin typeface="Consolas"/>
-            </a:endParaRPr>
-          </a:p>
-        </p:txBody>
-      </p:sp>
-      <p:sp>
-        <p:nvSpPr>
-          <p:cNvPr id="800" name="TextBox 13"/>
-          <p:cNvSpPr txBox="1"/>
-          <p:nvPr/>
-        </p:nvSpPr>
-        <p:spPr>
-          <a:xfrm>
-            <a:off x="1270000" y="2946400"/>
-            <a:ext cx="4572000" cy="301447"/>
-          </a:xfrm>
-          <a:prstGeom prst="rect">
-            <a:avLst/>
-          </a:prstGeom>
-        </p:spPr>
-        <p:txBody>
-          <a:bodyPr wrap="square">
-            <a:spAutoFit/>
-          </a:bodyPr>
-          <a:lstStyle/>
-          <a:p>
-            <a:pPr algn="l">
-              <a:lnSpc>
-                <a:spcPct val="130000"/>
-              </a:lnSpc>
-              <a:spcAft>
-                <a:spcPts val="0"/>
-              </a:spcAft>
-            </a:pPr>
-            <a:r>
-              <a:rPr sz="1060" b="0" i="0" cap="none">
-                <a:solidFill>
-                  <a:srgbClr val="1B1A18"/>
-                </a:solidFill>
-                <a:latin typeface="Georgia"/>
-              </a:rPr>
-              <a:t>Абсолютные голоса стагнируют, а доля падает при росте явки.</a:t>
-            </a:r>
-            <a:endParaRPr sz="1060" b="0" i="0" cap="none">
-              <a:solidFill>
-                <a:srgbClr val="1B1A18"/>
-              </a:solidFill>
-              <a:latin typeface="Georgia"/>
-            </a:endParaRPr>
-          </a:p>
-        </p:txBody>
-      </p:sp>
-      <p:sp>
-        <p:nvSpPr>
-          <p:cNvPr id="801" name="TextBox 14"/>
-          <p:cNvSpPr txBox="1"/>
-          <p:nvPr/>
-        </p:nvSpPr>
-        <p:spPr>
-          <a:xfrm>
-            <a:off x="812800" y="3683000"/>
-            <a:ext cx="381000" cy="249174"/>
-          </a:xfrm>
-          <a:prstGeom prst="rect">
-            <a:avLst/>
-          </a:prstGeom>
-        </p:spPr>
-        <p:txBody>
-          <a:bodyPr wrap="square">
-            <a:spAutoFit/>
-          </a:bodyPr>
-          <a:lstStyle/>
-          <a:p>
-            <a:pPr algn="l">
-              <a:lnSpc>
-                <a:spcPct val="115000"/>
-              </a:lnSpc>
-              <a:spcAft>
-                <a:spcPts val="0"/>
-              </a:spcAft>
-            </a:pPr>
-            <a:r>
-              <a:rPr sz="900" b="0" i="0" cap="none">
-                <a:solidFill>
-                  <a:srgbClr val="A82C1E"/>
-                </a:solidFill>
-                <a:latin typeface="Consolas"/>
-              </a:rPr>
-              <a:t>03</a:t>
-            </a:r>
-            <a:endParaRPr sz="900" b="0" i="0" cap="none">
-              <a:solidFill>
-                <a:srgbClr val="A82C1E"/>
-              </a:solidFill>
-              <a:latin typeface="Consolas"/>
-            </a:endParaRPr>
-          </a:p>
-        </p:txBody>
-      </p:sp>
-      <p:sp>
-        <p:nvSpPr>
-          <p:cNvPr id="802" name="TextBox 15"/>
-          <p:cNvSpPr txBox="1"/>
-          <p:nvPr/>
-        </p:nvSpPr>
-        <p:spPr>
-          <a:xfrm>
-            <a:off x="1270000" y="3657600"/>
-            <a:ext cx="4572000" cy="301447"/>
-          </a:xfrm>
-          <a:prstGeom prst="rect">
-            <a:avLst/>
-          </a:prstGeom>
-        </p:spPr>
-        <p:txBody>
-          <a:bodyPr wrap="square">
-            <a:spAutoFit/>
-          </a:bodyPr>
-          <a:lstStyle/>
-          <a:p>
-            <a:pPr algn="l">
-              <a:lnSpc>
-                <a:spcPct val="130000"/>
-              </a:lnSpc>
-              <a:spcAft>
-                <a:spcPts val="0"/>
-              </a:spcAft>
-            </a:pPr>
-            <a:r>
-              <a:rPr sz="1060" b="0" i="0" cap="none">
-                <a:solidFill>
-                  <a:srgbClr val="1B1A18"/>
-                </a:solidFill>
-                <a:latin typeface="Georgia"/>
-              </a:rPr>
-              <a:t>Поддержка 18–34 ниже средней по партии в разы.</a:t>
-            </a:r>
-            <a:endParaRPr sz="1060" b="0" i="0" cap="none">
-              <a:solidFill>
-                <a:srgbClr val="1B1A18"/>
-              </a:solidFill>
-              <a:latin typeface="Georgia"/>
-            </a:endParaRPr>
-          </a:p>
-        </p:txBody>
-      </p:sp>
-      <p:sp>
-        <p:nvSpPr>
-          <p:cNvPr id="803" name="TextBox 16"/>
-          <p:cNvSpPr txBox="1"/>
-          <p:nvPr/>
-        </p:nvSpPr>
-        <p:spPr>
-          <a:xfrm>
-            <a:off x="812800" y="4394200"/>
-            <a:ext cx="381000" cy="249174"/>
-          </a:xfrm>
-          <a:prstGeom prst="rect">
-            <a:avLst/>
-          </a:prstGeom>
-        </p:spPr>
-        <p:txBody>
-          <a:bodyPr wrap="square">
-            <a:spAutoFit/>
-          </a:bodyPr>
-          <a:lstStyle/>
-          <a:p>
-            <a:pPr algn="l">
-              <a:lnSpc>
-                <a:spcPct val="115000"/>
-              </a:lnSpc>
-              <a:spcAft>
-                <a:spcPts val="0"/>
-              </a:spcAft>
-            </a:pPr>
-            <a:r>
-              <a:rPr sz="900" b="0" i="0" cap="none">
-                <a:solidFill>
-                  <a:srgbClr val="A82C1E"/>
-                </a:solidFill>
-                <a:latin typeface="Consolas"/>
-              </a:rPr>
-              <a:t>04</a:t>
-            </a:r>
-            <a:endParaRPr sz="900" b="0" i="0" cap="none">
-              <a:solidFill>
-                <a:srgbClr val="A82C1E"/>
-              </a:solidFill>
-              <a:latin typeface="Consolas"/>
-            </a:endParaRPr>
-          </a:p>
-        </p:txBody>
-      </p:sp>
-      <p:sp>
-        <p:nvSpPr>
-          <p:cNvPr id="804" name="TextBox 17"/>
-          <p:cNvSpPr txBox="1"/>
-          <p:nvPr/>
-        </p:nvSpPr>
-        <p:spPr>
-          <a:xfrm>
-            <a:off x="1270000" y="4368800"/>
-            <a:ext cx="4572000" cy="511454"/>
-          </a:xfrm>
-          <a:prstGeom prst="rect">
-            <a:avLst/>
-          </a:prstGeom>
-        </p:spPr>
-        <p:txBody>
-          <a:bodyPr wrap="square">
-            <a:spAutoFit/>
-          </a:bodyPr>
-          <a:lstStyle/>
-          <a:p>
-            <a:pPr algn="l">
-              <a:lnSpc>
-                <a:spcPct val="130000"/>
-              </a:lnSpc>
-              <a:spcAft>
-                <a:spcPts val="0"/>
-              </a:spcAft>
-            </a:pPr>
-            <a:r>
-              <a:rPr sz="1060" b="0" i="0" cap="none">
-                <a:solidFill>
-                  <a:srgbClr val="1B1A18"/>
-                </a:solidFill>
-                <a:latin typeface="Georgia"/>
-              </a:rPr>
-              <a:t>В новых районах с молодой структурой результат ниже, чем в старых спальных.</a:t>
-            </a:r>
-            <a:endParaRPr sz="1060" b="0" i="0" cap="none">
-              <a:solidFill>
-                <a:srgbClr val="1B1A18"/>
-              </a:solidFill>
-              <a:latin typeface="Georgia"/>
-            </a:endParaRPr>
-          </a:p>
-        </p:txBody>
-      </p:sp>
-      <p:sp>
-        <p:nvSpPr>
-          <p:cNvPr id="805" name="TextBox 18"/>
-          <p:cNvSpPr txBox="1"/>
-          <p:nvPr/>
-        </p:nvSpPr>
-        <p:spPr>
-          <a:xfrm>
-            <a:off x="812800" y="5105400"/>
-            <a:ext cx="381000" cy="249174"/>
-          </a:xfrm>
-          <a:prstGeom prst="rect">
-            <a:avLst/>
-          </a:prstGeom>
-        </p:spPr>
-        <p:txBody>
-          <a:bodyPr wrap="square">
-            <a:spAutoFit/>
-          </a:bodyPr>
-          <a:lstStyle/>
-          <a:p>
-            <a:pPr algn="l">
-              <a:lnSpc>
-                <a:spcPct val="115000"/>
-              </a:lnSpc>
-              <a:spcAft>
-                <a:spcPts val="0"/>
-              </a:spcAft>
-            </a:pPr>
-            <a:r>
-              <a:rPr sz="900" b="0" i="0" cap="none">
-                <a:solidFill>
-                  <a:srgbClr val="A82C1E"/>
-                </a:solidFill>
-                <a:latin typeface="Consolas"/>
-              </a:rPr>
-              <a:t>05</a:t>
-            </a:r>
-            <a:endParaRPr sz="900" b="0" i="0" cap="none">
-              <a:solidFill>
-                <a:srgbClr val="A82C1E"/>
-              </a:solidFill>
-              <a:latin typeface="Consolas"/>
-            </a:endParaRPr>
-          </a:p>
-        </p:txBody>
-      </p:sp>
-      <p:sp>
-        <p:nvSpPr>
-          <p:cNvPr id="806" name="TextBox 19"/>
-          <p:cNvSpPr txBox="1"/>
-          <p:nvPr/>
-        </p:nvSpPr>
-        <p:spPr>
-          <a:xfrm>
-            <a:off x="1270000" y="5080000"/>
-            <a:ext cx="4572000" cy="301447"/>
-          </a:xfrm>
-          <a:prstGeom prst="rect">
-            <a:avLst/>
-          </a:prstGeom>
-        </p:spPr>
-        <p:txBody>
-          <a:bodyPr wrap="square">
-            <a:spAutoFit/>
-          </a:bodyPr>
-          <a:lstStyle/>
-          <a:p>
-            <a:pPr algn="l">
-              <a:lnSpc>
-                <a:spcPct val="130000"/>
-              </a:lnSpc>
-              <a:spcAft>
-                <a:spcPts val="0"/>
-              </a:spcAft>
-            </a:pPr>
-            <a:r>
-              <a:rPr sz="1060" b="0" i="0" cap="none">
-                <a:solidFill>
-                  <a:srgbClr val="1B1A18"/>
-                </a:solidFill>
-                <a:latin typeface="Georgia"/>
-              </a:rPr>
-              <a:t>Приток в партию и ЛКСМ не компенсирует выбытие.</a:t>
-            </a:r>
-            <a:endParaRPr sz="1060" b="0" i="0" cap="none">
-              <a:solidFill>
-                <a:srgbClr val="1B1A18"/>
-              </a:solidFill>
-              <a:latin typeface="Georgia"/>
-            </a:endParaRPr>
-          </a:p>
-        </p:txBody>
-      </p:sp>
-      <p:sp>
-        <p:nvSpPr>
-          <p:cNvPr id="807" name="Rectangle 20"/>
+          <p:cNvPr id="858" name="Rectangle 10"/>
           <p:cNvSpPr/>
           <p:nvPr/>
         </p:nvSpPr>
         <p:spPr>
           <a:xfrm>
-            <a:off x="6350000" y="1854200"/>
-            <a:ext cx="12700" cy="4064000"/>
+            <a:off x="812800" y="2489200"/>
+            <a:ext cx="10972800" cy="1219200"/>
           </a:xfrm>
           <a:prstGeom prst="rect">
             <a:avLst/>
@@ -12557,14 +12158,147 @@
       </p:sp>
       <p:sp>
         <p:nvSpPr>
-          <p:cNvPr id="808" name="TextBox 21"/>
-          <p:cNvSpPr txBox="1"/>
-          <p:nvPr/>
-        </p:nvSpPr>
-        <p:spPr>
-          <a:xfrm>
-            <a:off x="6654800" y="1854200"/>
-            <a:ext cx="4318000" cy="249174"/>
+          <p:cNvPr id="859" name="TextBox 11"/>
+          <p:cNvSpPr txBox="1"/>
+          <p:nvPr/>
+        </p:nvSpPr>
+        <p:spPr>
+          <a:xfrm>
+            <a:off x="1016000" y="2667000"/>
+            <a:ext cx="10541000" cy="601675"/>
+          </a:xfrm>
+          <a:prstGeom prst="rect">
+            <a:avLst/>
+          </a:prstGeom>
+        </p:spPr>
+        <p:txBody>
+          <a:bodyPr wrap="square">
+            <a:spAutoFit/>
+          </a:bodyPr>
+          <a:lstStyle/>
+          <a:p>
+            <a:pPr algn="l">
+              <a:lnSpc>
+                <a:spcPct val="135000"/>
+              </a:lnSpc>
+              <a:spcAft>
+                <a:spcPts val="0"/>
+              </a:spcAft>
+            </a:pPr>
+            <a:r>
+              <a:rPr sz="1240" b="0" i="0" cap="none">
+                <a:solidFill>
+                  <a:srgbClr val="F0E8D6"/>
+                </a:solidFill>
+                <a:latin typeface="Georgia"/>
+              </a:rPr>
+              <a:t>Поддержка КПРФ сокращается главным образом из-за когортного замещения: уходят поколения, социализированные в СССР, а новые поколения не формируют партийной идентификации с партией. Организационная слабость усиливает эффект, но не создаёт его.</a:t>
+            </a:r>
+            <a:endParaRPr sz="1240" b="0" i="0" cap="none">
+              <a:solidFill>
+                <a:srgbClr val="F0E8D6"/>
+              </a:solidFill>
+              <a:latin typeface="Georgia"/>
+            </a:endParaRPr>
+          </a:p>
+        </p:txBody>
+      </p:sp>
+      <p:sp>
+        <p:nvSpPr>
+          <p:cNvPr id="860" name="Rectangle 12"/>
+          <p:cNvSpPr/>
+          <p:nvPr/>
+        </p:nvSpPr>
+        <p:spPr>
+          <a:xfrm>
+            <a:off x="812800" y="3937000"/>
+            <a:ext cx="3454400" cy="1524000"/>
+          </a:xfrm>
+          <a:prstGeom prst="rect">
+            <a:avLst/>
+          </a:prstGeom>
+          <a:solidFill>
+            <a:srgbClr val="DED3B7"/>
+          </a:solidFill>
+          <a:ln>
+            <a:noFill/>
+          </a:ln>
+        </p:spPr>
+        <p:style>
+          <a:lnRef idx="2">
+            <a:schemeClr val="accent1">
+              <a:shade val="50000"/>
+            </a:schemeClr>
+          </a:lnRef>
+          <a:fillRef idx="1">
+            <a:schemeClr val="accent1"/>
+          </a:fillRef>
+          <a:effectRef idx="0">
+            <a:schemeClr val="accent1"/>
+          </a:effectRef>
+          <a:fontRef idx="minor">
+            <a:schemeClr val="lt1"/>
+          </a:fontRef>
+        </p:style>
+        <p:txBody>
+          <a:bodyPr anchor="ctr"/>
+          <a:lstStyle/>
+          <a:p/>
+        </p:txBody>
+      </p:sp>
+      <p:sp>
+        <p:nvSpPr>
+          <p:cNvPr id="861" name="Rectangle 13"/>
+          <p:cNvSpPr/>
+          <p:nvPr/>
+        </p:nvSpPr>
+        <p:spPr>
+          <a:xfrm>
+            <a:off x="812800" y="3937000"/>
+            <a:ext cx="3454400" cy="63500"/>
+          </a:xfrm>
+          <a:prstGeom prst="rect">
+            <a:avLst/>
+          </a:prstGeom>
+          <a:solidFill>
+            <a:srgbClr val="A82C1E"/>
+          </a:solidFill>
+          <a:ln>
+            <a:noFill/>
+          </a:ln>
+        </p:spPr>
+        <p:style>
+          <a:lnRef idx="2">
+            <a:schemeClr val="accent1">
+              <a:shade val="50000"/>
+            </a:schemeClr>
+          </a:lnRef>
+          <a:fillRef idx="1">
+            <a:schemeClr val="accent1"/>
+          </a:fillRef>
+          <a:effectRef idx="0">
+            <a:schemeClr val="accent1"/>
+          </a:effectRef>
+          <a:fontRef idx="minor">
+            <a:schemeClr val="lt1"/>
+          </a:fontRef>
+        </p:style>
+        <p:txBody>
+          <a:bodyPr anchor="ctr"/>
+          <a:lstStyle/>
+          <a:p/>
+        </p:txBody>
+      </p:sp>
+      <p:sp>
+        <p:nvSpPr>
+          <p:cNvPr id="862" name="TextBox 14"/>
+          <p:cNvSpPr txBox="1"/>
+          <p:nvPr/>
+        </p:nvSpPr>
+        <p:spPr>
+          <a:xfrm>
+            <a:off x="1016000" y="4089400"/>
+            <a:ext cx="635000" cy="252679"/>
           </a:xfrm>
           <a:prstGeom prst="rect">
             <a:avLst/>
@@ -12585,15 +12319,15 @@
               </a:spcAft>
             </a:pPr>
             <a:r>
-              <a:rPr sz="900" b="0" i="0" cap="none" spc="200">
+              <a:rPr sz="920" b="0" i="0" cap="none" spc="120">
                 <a:solidFill>
                   <a:srgbClr val="A82C1E"/>
                 </a:solidFill>
                 <a:latin typeface="Consolas"/>
               </a:rPr>
-              <a:t>ЧТО ОПРОВЕРГНЕТ</a:t>
-            </a:r>
-            <a:endParaRPr sz="900" b="0" i="0" cap="none" spc="200">
+              <a:t>H1</a:t>
+            </a:r>
+            <a:endParaRPr sz="920" b="0" i="0" cap="none" spc="120">
               <a:solidFill>
                 <a:srgbClr val="A82C1E"/>
               </a:solidFill>
@@ -12604,14 +12338,14 @@
       </p:sp>
       <p:sp>
         <p:nvSpPr>
-          <p:cNvPr id="809" name="TextBox 22"/>
-          <p:cNvSpPr txBox="1"/>
-          <p:nvPr/>
-        </p:nvSpPr>
-        <p:spPr>
-          <a:xfrm>
-            <a:off x="6654800" y="2235200"/>
-            <a:ext cx="254000" cy="284226"/>
+          <p:cNvPr id="863" name="TextBox 15"/>
+          <p:cNvSpPr txBox="1"/>
+          <p:nvPr/>
+        </p:nvSpPr>
+        <p:spPr>
+          <a:xfrm>
+            <a:off x="1016000" y="4343400"/>
+            <a:ext cx="3048000" cy="319278"/>
           </a:xfrm>
           <a:prstGeom prst="rect">
             <a:avLst/>
@@ -12632,18 +12366,519 @@
               </a:spcAft>
             </a:pPr>
             <a:r>
-              <a:rPr sz="1100" b="0" i="0" cap="none">
+              <a:rPr sz="1300" b="0" i="0" cap="none">
+                <a:solidFill>
+                  <a:srgbClr val="1B1A18"/>
+                </a:solidFill>
+                <a:latin typeface="Bahnschrift SemiBold"/>
+              </a:rPr>
+              <a:t>Композиция</a:t>
+            </a:r>
+            <a:endParaRPr sz="1300" b="0" i="0" cap="none">
+              <a:solidFill>
+                <a:srgbClr val="1B1A18"/>
+              </a:solidFill>
+              <a:latin typeface="Bahnschrift SemiBold"/>
+            </a:endParaRPr>
+          </a:p>
+        </p:txBody>
+      </p:sp>
+      <p:sp>
+        <p:nvSpPr>
+          <p:cNvPr id="864" name="TextBox 16"/>
+          <p:cNvSpPr txBox="1"/>
+          <p:nvPr/>
+        </p:nvSpPr>
+        <p:spPr>
+          <a:xfrm>
+            <a:off x="1016000" y="4648200"/>
+            <a:ext cx="3048000" cy="662026"/>
+          </a:xfrm>
+          <a:prstGeom prst="rect">
+            <a:avLst/>
+          </a:prstGeom>
+        </p:spPr>
+        <p:txBody>
+          <a:bodyPr wrap="square">
+            <a:spAutoFit/>
+          </a:bodyPr>
+          <a:lstStyle/>
+          <a:p>
+            <a:pPr algn="l">
+              <a:lnSpc>
+                <a:spcPct val="130000"/>
+              </a:lnSpc>
+              <a:spcAft>
+                <a:spcPts val="0"/>
+              </a:spcAft>
+            </a:pPr>
+            <a:r>
+              <a:rPr sz="960" b="0" i="0" cap="none">
+                <a:solidFill>
+                  <a:srgbClr val="55503F"/>
+                </a:solidFill>
+                <a:latin typeface="Georgia"/>
+              </a:rPr>
+              <a:t>Доля 55+ растёт не потому, что пожилые «переходят» к КПРФ, а потому, что молодые не приходят.</a:t>
+            </a:r>
+            <a:endParaRPr sz="960" b="0" i="0" cap="none">
+              <a:solidFill>
+                <a:srgbClr val="55503F"/>
+              </a:solidFill>
+              <a:latin typeface="Georgia"/>
+            </a:endParaRPr>
+          </a:p>
+        </p:txBody>
+      </p:sp>
+      <p:sp>
+        <p:nvSpPr>
+          <p:cNvPr id="865" name="Rectangle 17"/>
+          <p:cNvSpPr/>
+          <p:nvPr/>
+        </p:nvSpPr>
+        <p:spPr>
+          <a:xfrm>
+            <a:off x="4495800" y="3937000"/>
+            <a:ext cx="3454400" cy="1524000"/>
+          </a:xfrm>
+          <a:prstGeom prst="rect">
+            <a:avLst/>
+          </a:prstGeom>
+          <a:solidFill>
+            <a:srgbClr val="DED3B7"/>
+          </a:solidFill>
+          <a:ln>
+            <a:noFill/>
+          </a:ln>
+        </p:spPr>
+        <p:style>
+          <a:lnRef idx="2">
+            <a:schemeClr val="accent1">
+              <a:shade val="50000"/>
+            </a:schemeClr>
+          </a:lnRef>
+          <a:fillRef idx="1">
+            <a:schemeClr val="accent1"/>
+          </a:fillRef>
+          <a:effectRef idx="0">
+            <a:schemeClr val="accent1"/>
+          </a:effectRef>
+          <a:fontRef idx="minor">
+            <a:schemeClr val="lt1"/>
+          </a:fontRef>
+        </p:style>
+        <p:txBody>
+          <a:bodyPr anchor="ctr"/>
+          <a:lstStyle/>
+          <a:p/>
+        </p:txBody>
+      </p:sp>
+      <p:sp>
+        <p:nvSpPr>
+          <p:cNvPr id="866" name="Rectangle 18"/>
+          <p:cNvSpPr/>
+          <p:nvPr/>
+        </p:nvSpPr>
+        <p:spPr>
+          <a:xfrm>
+            <a:off x="4495800" y="3937000"/>
+            <a:ext cx="3454400" cy="63500"/>
+          </a:xfrm>
+          <a:prstGeom prst="rect">
+            <a:avLst/>
+          </a:prstGeom>
+          <a:solidFill>
+            <a:srgbClr val="A82C1E"/>
+          </a:solidFill>
+          <a:ln>
+            <a:noFill/>
+          </a:ln>
+        </p:spPr>
+        <p:style>
+          <a:lnRef idx="2">
+            <a:schemeClr val="accent1">
+              <a:shade val="50000"/>
+            </a:schemeClr>
+          </a:lnRef>
+          <a:fillRef idx="1">
+            <a:schemeClr val="accent1"/>
+          </a:fillRef>
+          <a:effectRef idx="0">
+            <a:schemeClr val="accent1"/>
+          </a:effectRef>
+          <a:fontRef idx="minor">
+            <a:schemeClr val="lt1"/>
+          </a:fontRef>
+        </p:style>
+        <p:txBody>
+          <a:bodyPr anchor="ctr"/>
+          <a:lstStyle/>
+          <a:p/>
+        </p:txBody>
+      </p:sp>
+      <p:sp>
+        <p:nvSpPr>
+          <p:cNvPr id="867" name="TextBox 19"/>
+          <p:cNvSpPr txBox="1"/>
+          <p:nvPr/>
+        </p:nvSpPr>
+        <p:spPr>
+          <a:xfrm>
+            <a:off x="4699000" y="4089400"/>
+            <a:ext cx="635000" cy="252679"/>
+          </a:xfrm>
+          <a:prstGeom prst="rect">
+            <a:avLst/>
+          </a:prstGeom>
+        </p:spPr>
+        <p:txBody>
+          <a:bodyPr wrap="square">
+            <a:spAutoFit/>
+          </a:bodyPr>
+          <a:lstStyle/>
+          <a:p>
+            <a:pPr algn="l">
+              <a:lnSpc>
+                <a:spcPct val="115000"/>
+              </a:lnSpc>
+              <a:spcAft>
+                <a:spcPts val="0"/>
+              </a:spcAft>
+            </a:pPr>
+            <a:r>
+              <a:rPr sz="920" b="0" i="0" cap="none" spc="120">
                 <a:solidFill>
                   <a:srgbClr val="A82C1E"/>
                 </a:solidFill>
+                <a:latin typeface="Consolas"/>
+              </a:rPr>
+              <a:t>H2</a:t>
+            </a:r>
+            <a:endParaRPr sz="920" b="0" i="0" cap="none" spc="120">
+              <a:solidFill>
+                <a:srgbClr val="A82C1E"/>
+              </a:solidFill>
+              <a:latin typeface="Consolas"/>
+            </a:endParaRPr>
+          </a:p>
+        </p:txBody>
+      </p:sp>
+      <p:sp>
+        <p:nvSpPr>
+          <p:cNvPr id="868" name="TextBox 20"/>
+          <p:cNvSpPr txBox="1"/>
+          <p:nvPr/>
+        </p:nvSpPr>
+        <p:spPr>
+          <a:xfrm>
+            <a:off x="4699000" y="4343400"/>
+            <a:ext cx="3048000" cy="319278"/>
+          </a:xfrm>
+          <a:prstGeom prst="rect">
+            <a:avLst/>
+          </a:prstGeom>
+        </p:spPr>
+        <p:txBody>
+          <a:bodyPr wrap="square">
+            <a:spAutoFit/>
+          </a:bodyPr>
+          <a:lstStyle/>
+          <a:p>
+            <a:pPr algn="l">
+              <a:lnSpc>
+                <a:spcPct val="115000"/>
+              </a:lnSpc>
+              <a:spcAft>
+                <a:spcPts val="0"/>
+              </a:spcAft>
+            </a:pPr>
+            <a:r>
+              <a:rPr sz="1300" b="0" i="0" cap="none">
+                <a:solidFill>
+                  <a:srgbClr val="1B1A18"/>
+                </a:solidFill>
+                <a:latin typeface="Bahnschrift SemiBold"/>
+              </a:rPr>
+              <a:t>Социализация</a:t>
+            </a:r>
+            <a:endParaRPr sz="1300" b="0" i="0" cap="none">
+              <a:solidFill>
+                <a:srgbClr val="1B1A18"/>
+              </a:solidFill>
+              <a:latin typeface="Bahnschrift SemiBold"/>
+            </a:endParaRPr>
+          </a:p>
+        </p:txBody>
+      </p:sp>
+      <p:sp>
+        <p:nvSpPr>
+          <p:cNvPr id="869" name="TextBox 21"/>
+          <p:cNvSpPr txBox="1"/>
+          <p:nvPr/>
+        </p:nvSpPr>
+        <p:spPr>
+          <a:xfrm>
+            <a:off x="4699000" y="4648200"/>
+            <a:ext cx="3048000" cy="662026"/>
+          </a:xfrm>
+          <a:prstGeom prst="rect">
+            <a:avLst/>
+          </a:prstGeom>
+        </p:spPr>
+        <p:txBody>
+          <a:bodyPr wrap="square">
+            <a:spAutoFit/>
+          </a:bodyPr>
+          <a:lstStyle/>
+          <a:p>
+            <a:pPr algn="l">
+              <a:lnSpc>
+                <a:spcPct val="130000"/>
+              </a:lnSpc>
+              <a:spcAft>
+                <a:spcPts val="0"/>
+              </a:spcAft>
+            </a:pPr>
+            <a:r>
+              <a:rPr sz="960" b="0" i="0" cap="none">
+                <a:solidFill>
+                  <a:srgbClr val="55503F"/>
+                </a:solidFill>
                 <a:latin typeface="Georgia"/>
               </a:rPr>
-              <a:t>—</a:t>
-            </a:r>
-            <a:endParaRPr sz="1100" b="0" i="0" cap="none">
+              <a:t>У когорт, социализированных после 1991 года, вероятность голосовать за КПРФ ниже при контроле на доход и образование.</a:t>
+            </a:r>
+            <a:endParaRPr sz="960" b="0" i="0" cap="none">
+              <a:solidFill>
+                <a:srgbClr val="55503F"/>
+              </a:solidFill>
+              <a:latin typeface="Georgia"/>
+            </a:endParaRPr>
+          </a:p>
+        </p:txBody>
+      </p:sp>
+      <p:sp>
+        <p:nvSpPr>
+          <p:cNvPr id="870" name="Rectangle 22"/>
+          <p:cNvSpPr/>
+          <p:nvPr/>
+        </p:nvSpPr>
+        <p:spPr>
+          <a:xfrm>
+            <a:off x="8178800" y="3937000"/>
+            <a:ext cx="3454400" cy="1524000"/>
+          </a:xfrm>
+          <a:prstGeom prst="rect">
+            <a:avLst/>
+          </a:prstGeom>
+          <a:solidFill>
+            <a:srgbClr val="DED3B7"/>
+          </a:solidFill>
+          <a:ln>
+            <a:noFill/>
+          </a:ln>
+        </p:spPr>
+        <p:style>
+          <a:lnRef idx="2">
+            <a:schemeClr val="accent1">
+              <a:shade val="50000"/>
+            </a:schemeClr>
+          </a:lnRef>
+          <a:fillRef idx="1">
+            <a:schemeClr val="accent1"/>
+          </a:fillRef>
+          <a:effectRef idx="0">
+            <a:schemeClr val="accent1"/>
+          </a:effectRef>
+          <a:fontRef idx="minor">
+            <a:schemeClr val="lt1"/>
+          </a:fontRef>
+        </p:style>
+        <p:txBody>
+          <a:bodyPr anchor="ctr"/>
+          <a:lstStyle/>
+          <a:p/>
+        </p:txBody>
+      </p:sp>
+      <p:sp>
+        <p:nvSpPr>
+          <p:cNvPr id="871" name="Rectangle 23"/>
+          <p:cNvSpPr/>
+          <p:nvPr/>
+        </p:nvSpPr>
+        <p:spPr>
+          <a:xfrm>
+            <a:off x="8178800" y="3937000"/>
+            <a:ext cx="3454400" cy="63500"/>
+          </a:xfrm>
+          <a:prstGeom prst="rect">
+            <a:avLst/>
+          </a:prstGeom>
+          <a:solidFill>
+            <a:srgbClr val="A82C1E"/>
+          </a:solidFill>
+          <a:ln>
+            <a:noFill/>
+          </a:ln>
+        </p:spPr>
+        <p:style>
+          <a:lnRef idx="2">
+            <a:schemeClr val="accent1">
+              <a:shade val="50000"/>
+            </a:schemeClr>
+          </a:lnRef>
+          <a:fillRef idx="1">
+            <a:schemeClr val="accent1"/>
+          </a:fillRef>
+          <a:effectRef idx="0">
+            <a:schemeClr val="accent1"/>
+          </a:effectRef>
+          <a:fontRef idx="minor">
+            <a:schemeClr val="lt1"/>
+          </a:fontRef>
+        </p:style>
+        <p:txBody>
+          <a:bodyPr anchor="ctr"/>
+          <a:lstStyle/>
+          <a:p/>
+        </p:txBody>
+      </p:sp>
+      <p:sp>
+        <p:nvSpPr>
+          <p:cNvPr id="872" name="TextBox 24"/>
+          <p:cNvSpPr txBox="1"/>
+          <p:nvPr/>
+        </p:nvSpPr>
+        <p:spPr>
+          <a:xfrm>
+            <a:off x="8382000" y="4089400"/>
+            <a:ext cx="635000" cy="252679"/>
+          </a:xfrm>
+          <a:prstGeom prst="rect">
+            <a:avLst/>
+          </a:prstGeom>
+        </p:spPr>
+        <p:txBody>
+          <a:bodyPr wrap="square">
+            <a:spAutoFit/>
+          </a:bodyPr>
+          <a:lstStyle/>
+          <a:p>
+            <a:pPr algn="l">
+              <a:lnSpc>
+                <a:spcPct val="115000"/>
+              </a:lnSpc>
+              <a:spcAft>
+                <a:spcPts val="0"/>
+              </a:spcAft>
+            </a:pPr>
+            <a:r>
+              <a:rPr sz="920" b="0" i="0" cap="none" spc="120">
+                <a:solidFill>
+                  <a:srgbClr val="A82C1E"/>
+                </a:solidFill>
+                <a:latin typeface="Consolas"/>
+              </a:rPr>
+              <a:t>H3</a:t>
+            </a:r>
+            <a:endParaRPr sz="920" b="0" i="0" cap="none" spc="120">
               <a:solidFill>
                 <a:srgbClr val="A82C1E"/>
               </a:solidFill>
+              <a:latin typeface="Consolas"/>
+            </a:endParaRPr>
+          </a:p>
+        </p:txBody>
+      </p:sp>
+      <p:sp>
+        <p:nvSpPr>
+          <p:cNvPr id="873" name="TextBox 25"/>
+          <p:cNvSpPr txBox="1"/>
+          <p:nvPr/>
+        </p:nvSpPr>
+        <p:spPr>
+          <a:xfrm>
+            <a:off x="8382000" y="4343400"/>
+            <a:ext cx="3048000" cy="319278"/>
+          </a:xfrm>
+          <a:prstGeom prst="rect">
+            <a:avLst/>
+          </a:prstGeom>
+        </p:spPr>
+        <p:txBody>
+          <a:bodyPr wrap="square">
+            <a:spAutoFit/>
+          </a:bodyPr>
+          <a:lstStyle/>
+          <a:p>
+            <a:pPr algn="l">
+              <a:lnSpc>
+                <a:spcPct val="115000"/>
+              </a:lnSpc>
+              <a:spcAft>
+                <a:spcPts val="0"/>
+              </a:spcAft>
+            </a:pPr>
+            <a:r>
+              <a:rPr sz="1300" b="0" i="0" cap="none">
+                <a:solidFill>
+                  <a:srgbClr val="1B1A18"/>
+                </a:solidFill>
+                <a:latin typeface="Bahnschrift SemiBold"/>
+              </a:rPr>
+              <a:t>Модерация</a:t>
+            </a:r>
+            <a:endParaRPr sz="1300" b="0" i="0" cap="none">
+              <a:solidFill>
+                <a:srgbClr val="1B1A18"/>
+              </a:solidFill>
+              <a:latin typeface="Bahnschrift SemiBold"/>
+            </a:endParaRPr>
+          </a:p>
+        </p:txBody>
+      </p:sp>
+      <p:sp>
+        <p:nvSpPr>
+          <p:cNvPr id="874" name="TextBox 26"/>
+          <p:cNvSpPr txBox="1"/>
+          <p:nvPr/>
+        </p:nvSpPr>
+        <p:spPr>
+          <a:xfrm>
+            <a:off x="8382000" y="4648200"/>
+            <a:ext cx="3048000" cy="471830"/>
+          </a:xfrm>
+          <a:prstGeom prst="rect">
+            <a:avLst/>
+          </a:prstGeom>
+        </p:spPr>
+        <p:txBody>
+          <a:bodyPr wrap="square">
+            <a:spAutoFit/>
+          </a:bodyPr>
+          <a:lstStyle/>
+          <a:p>
+            <a:pPr algn="l">
+              <a:lnSpc>
+                <a:spcPct val="130000"/>
+              </a:lnSpc>
+              <a:spcAft>
+                <a:spcPts val="0"/>
+              </a:spcAft>
+            </a:pPr>
+            <a:r>
+              <a:rPr sz="960" b="0" i="0" cap="none">
+                <a:solidFill>
+                  <a:srgbClr val="55503F"/>
+                </a:solidFill>
+                <a:latin typeface="Georgia"/>
+              </a:rPr>
+              <a:t>Там, где есть районная организация, межпоколенческий разрыв меньше.</a:t>
+            </a:r>
+            <a:endParaRPr sz="960" b="0" i="0" cap="none">
+              <a:solidFill>
+                <a:srgbClr val="55503F"/>
+              </a:solidFill>
               <a:latin typeface="Georgia"/>
             </a:endParaRPr>
           </a:p>
@@ -12651,14 +12886,14 @@
       </p:sp>
       <p:sp>
         <p:nvSpPr>
-          <p:cNvPr id="810" name="TextBox 23"/>
-          <p:cNvSpPr txBox="1"/>
-          <p:nvPr/>
-        </p:nvSpPr>
-        <p:spPr>
-          <a:xfrm>
-            <a:off x="6959600" y="2235200"/>
-            <a:ext cx="4267200" cy="297485"/>
+          <p:cNvPr id="875" name="TextBox 27"/>
+          <p:cNvSpPr txBox="1"/>
+          <p:nvPr/>
+        </p:nvSpPr>
+        <p:spPr>
+          <a:xfrm>
+            <a:off x="812800" y="5664200"/>
+            <a:ext cx="10972800" cy="277673"/>
           </a:xfrm>
           <a:prstGeom prst="rect">
             <a:avLst/>
@@ -12679,419 +12914,15 @@
               </a:spcAft>
             </a:pPr>
             <a:r>
-              <a:rPr sz="1040" b="0" i="0" cap="none">
-                <a:solidFill>
-                  <a:srgbClr val="1B1A18"/>
+              <a:rPr sz="940" b="0" i="1" cap="none">
+                <a:solidFill>
+                  <a:srgbClr val="55503F"/>
                 </a:solidFill>
                 <a:latin typeface="Georgia"/>
               </a:rPr>
-              <a:t>Рост абсолютных голосов при росте явки.</a:t>
-            </a:r>
-            <a:endParaRPr sz="1040" b="0" i="0" cap="none">
-              <a:solidFill>
-                <a:srgbClr val="1B1A18"/>
-              </a:solidFill>
-              <a:latin typeface="Georgia"/>
-            </a:endParaRPr>
-          </a:p>
-        </p:txBody>
-      </p:sp>
-      <p:sp>
-        <p:nvSpPr>
-          <p:cNvPr id="811" name="TextBox 24"/>
-          <p:cNvSpPr txBox="1"/>
-          <p:nvPr/>
-        </p:nvSpPr>
-        <p:spPr>
-          <a:xfrm>
-            <a:off x="6654800" y="2794000"/>
-            <a:ext cx="254000" cy="284226"/>
-          </a:xfrm>
-          <a:prstGeom prst="rect">
-            <a:avLst/>
-          </a:prstGeom>
-        </p:spPr>
-        <p:txBody>
-          <a:bodyPr wrap="square">
-            <a:spAutoFit/>
-          </a:bodyPr>
-          <a:lstStyle/>
-          <a:p>
-            <a:pPr algn="l">
-              <a:lnSpc>
-                <a:spcPct val="115000"/>
-              </a:lnSpc>
-              <a:spcAft>
-                <a:spcPts val="0"/>
-              </a:spcAft>
-            </a:pPr>
-            <a:r>
-              <a:rPr sz="1100" b="0" i="0" cap="none">
-                <a:solidFill>
-                  <a:srgbClr val="A82C1E"/>
-                </a:solidFill>
-                <a:latin typeface="Georgia"/>
-              </a:rPr>
-              <a:t>—</a:t>
-            </a:r>
-            <a:endParaRPr sz="1100" b="0" i="0" cap="none">
-              <a:solidFill>
-                <a:srgbClr val="A82C1E"/>
-              </a:solidFill>
-              <a:latin typeface="Georgia"/>
-            </a:endParaRPr>
-          </a:p>
-        </p:txBody>
-      </p:sp>
-      <p:sp>
-        <p:nvSpPr>
-          <p:cNvPr id="812" name="TextBox 25"/>
-          <p:cNvSpPr txBox="1"/>
-          <p:nvPr/>
-        </p:nvSpPr>
-        <p:spPr>
-          <a:xfrm>
-            <a:off x="6959600" y="2794000"/>
-            <a:ext cx="4267200" cy="297485"/>
-          </a:xfrm>
-          <a:prstGeom prst="rect">
-            <a:avLst/>
-          </a:prstGeom>
-        </p:spPr>
-        <p:txBody>
-          <a:bodyPr wrap="square">
-            <a:spAutoFit/>
-          </a:bodyPr>
-          <a:lstStyle/>
-          <a:p>
-            <a:pPr algn="l">
-              <a:lnSpc>
-                <a:spcPct val="130000"/>
-              </a:lnSpc>
-              <a:spcAft>
-                <a:spcPts val="0"/>
-              </a:spcAft>
-            </a:pPr>
-            <a:r>
-              <a:rPr sz="1040" b="0" i="0" cap="none">
-                <a:solidFill>
-                  <a:srgbClr val="1B1A18"/>
-                </a:solidFill>
-                <a:latin typeface="Georgia"/>
-              </a:rPr>
-              <a:t>Рост поддержки именно среди рабочей молодёжи.</a:t>
-            </a:r>
-            <a:endParaRPr sz="1040" b="0" i="0" cap="none">
-              <a:solidFill>
-                <a:srgbClr val="1B1A18"/>
-              </a:solidFill>
-              <a:latin typeface="Georgia"/>
-            </a:endParaRPr>
-          </a:p>
-        </p:txBody>
-      </p:sp>
-      <p:sp>
-        <p:nvSpPr>
-          <p:cNvPr id="813" name="TextBox 26"/>
-          <p:cNvSpPr txBox="1"/>
-          <p:nvPr/>
-        </p:nvSpPr>
-        <p:spPr>
-          <a:xfrm>
-            <a:off x="6654800" y="3352800"/>
-            <a:ext cx="254000" cy="284226"/>
-          </a:xfrm>
-          <a:prstGeom prst="rect">
-            <a:avLst/>
-          </a:prstGeom>
-        </p:spPr>
-        <p:txBody>
-          <a:bodyPr wrap="square">
-            <a:spAutoFit/>
-          </a:bodyPr>
-          <a:lstStyle/>
-          <a:p>
-            <a:pPr algn="l">
-              <a:lnSpc>
-                <a:spcPct val="115000"/>
-              </a:lnSpc>
-              <a:spcAft>
-                <a:spcPts val="0"/>
-              </a:spcAft>
-            </a:pPr>
-            <a:r>
-              <a:rPr sz="1100" b="0" i="0" cap="none">
-                <a:solidFill>
-                  <a:srgbClr val="A82C1E"/>
-                </a:solidFill>
-                <a:latin typeface="Georgia"/>
-              </a:rPr>
-              <a:t>—</a:t>
-            </a:r>
-            <a:endParaRPr sz="1100" b="0" i="0" cap="none">
-              <a:solidFill>
-                <a:srgbClr val="A82C1E"/>
-              </a:solidFill>
-              <a:latin typeface="Georgia"/>
-            </a:endParaRPr>
-          </a:p>
-        </p:txBody>
-      </p:sp>
-      <p:sp>
-        <p:nvSpPr>
-          <p:cNvPr id="814" name="TextBox 27"/>
-          <p:cNvSpPr txBox="1"/>
-          <p:nvPr/>
-        </p:nvSpPr>
-        <p:spPr>
-          <a:xfrm>
-            <a:off x="6959600" y="3352800"/>
-            <a:ext cx="4267200" cy="297485"/>
-          </a:xfrm>
-          <a:prstGeom prst="rect">
-            <a:avLst/>
-          </a:prstGeom>
-        </p:spPr>
-        <p:txBody>
-          <a:bodyPr wrap="square">
-            <a:spAutoFit/>
-          </a:bodyPr>
-          <a:lstStyle/>
-          <a:p>
-            <a:pPr algn="l">
-              <a:lnSpc>
-                <a:spcPct val="130000"/>
-              </a:lnSpc>
-              <a:spcAft>
-                <a:spcPts val="0"/>
-              </a:spcAft>
-            </a:pPr>
-            <a:r>
-              <a:rPr sz="1040" b="0" i="0" cap="none">
-                <a:solidFill>
-                  <a:srgbClr val="1B1A18"/>
-                </a:solidFill>
-                <a:latin typeface="Georgia"/>
-              </a:rPr>
-              <a:t>Омоложение членства и списков кандидатов.</a:t>
-            </a:r>
-            <a:endParaRPr sz="1040" b="0" i="0" cap="none">
-              <a:solidFill>
-                <a:srgbClr val="1B1A18"/>
-              </a:solidFill>
-              <a:latin typeface="Georgia"/>
-            </a:endParaRPr>
-          </a:p>
-        </p:txBody>
-      </p:sp>
-      <p:sp>
-        <p:nvSpPr>
-          <p:cNvPr id="815" name="TextBox 28"/>
-          <p:cNvSpPr txBox="1"/>
-          <p:nvPr/>
-        </p:nvSpPr>
-        <p:spPr>
-          <a:xfrm>
-            <a:off x="6654800" y="4064000"/>
-            <a:ext cx="4318000" cy="249174"/>
-          </a:xfrm>
-          <a:prstGeom prst="rect">
-            <a:avLst/>
-          </a:prstGeom>
-        </p:spPr>
-        <p:txBody>
-          <a:bodyPr wrap="square">
-            <a:spAutoFit/>
-          </a:bodyPr>
-          <a:lstStyle/>
-          <a:p>
-            <a:pPr algn="l">
-              <a:lnSpc>
-                <a:spcPct val="115000"/>
-              </a:lnSpc>
-              <a:spcAft>
-                <a:spcPts val="0"/>
-              </a:spcAft>
-            </a:pPr>
-            <a:r>
-              <a:rPr sz="900" b="0" i="0" cap="none" spc="200">
-                <a:solidFill>
-                  <a:srgbClr val="A82C1E"/>
-                </a:solidFill>
-                <a:latin typeface="Consolas"/>
-              </a:rPr>
-              <a:t>ЧЕМ ПРОВЕРЯТЬ</a:t>
-            </a:r>
-            <a:endParaRPr sz="900" b="0" i="0" cap="none" spc="200">
-              <a:solidFill>
-                <a:srgbClr val="A82C1E"/>
-              </a:solidFill>
-              <a:latin typeface="Consolas"/>
-            </a:endParaRPr>
-          </a:p>
-        </p:txBody>
-      </p:sp>
-      <p:sp>
-        <p:nvSpPr>
-          <p:cNvPr id="816" name="TextBox 29"/>
-          <p:cNvSpPr txBox="1"/>
-          <p:nvPr/>
-        </p:nvSpPr>
-        <p:spPr>
-          <a:xfrm>
-            <a:off x="6654800" y="4368800"/>
-            <a:ext cx="4318000" cy="957682"/>
-          </a:xfrm>
-          <a:prstGeom prst="rect">
-            <a:avLst/>
-          </a:prstGeom>
-        </p:spPr>
-        <p:txBody>
-          <a:bodyPr wrap="square">
-            <a:spAutoFit/>
-          </a:bodyPr>
-          <a:lstStyle/>
-          <a:p>
-            <a:pPr algn="l">
-              <a:lnSpc>
-                <a:spcPct val="145000"/>
-              </a:lnSpc>
-              <a:spcAft>
-                <a:spcPts val="0"/>
-              </a:spcAft>
-            </a:pPr>
-            <a:r>
-              <a:rPr sz="980" b="0" i="0" cap="none">
-                <a:solidFill>
-                  <a:srgbClr val="55503F"/>
-                </a:solidFill>
-                <a:latin typeface="Georgia"/>
-              </a:rPr>
-              <a:t>Протоколы УИК и явка по участкам;</a:t>
-            </a:r>
-            <a:endParaRPr sz="980" b="0" i="0" cap="none">
-              <a:solidFill>
-                <a:srgbClr val="55503F"/>
-              </a:solidFill>
-              <a:latin typeface="Georgia"/>
-            </a:endParaRPr>
-          </a:p>
-          <a:p>
-            <a:pPr algn="l">
-              <a:lnSpc>
-                <a:spcPct val="145000"/>
-              </a:lnSpc>
-              <a:spcAft>
-                <a:spcPts val="0"/>
-              </a:spcAft>
-            </a:pPr>
-            <a:r>
-              <a:rPr sz="980" b="0" i="0" cap="none">
-                <a:solidFill>
-                  <a:srgbClr val="55503F"/>
-                </a:solidFill>
-                <a:latin typeface="Georgia"/>
-              </a:rPr>
-              <a:t>exit poll и Левада по возрастам;</a:t>
-            </a:r>
-            <a:endParaRPr sz="980" b="0" i="0" cap="none">
-              <a:solidFill>
-                <a:srgbClr val="55503F"/>
-              </a:solidFill>
-              <a:latin typeface="Georgia"/>
-            </a:endParaRPr>
-          </a:p>
-          <a:p>
-            <a:pPr algn="l">
-              <a:lnSpc>
-                <a:spcPct val="145000"/>
-              </a:lnSpc>
-              <a:spcAft>
-                <a:spcPts val="0"/>
-              </a:spcAft>
-            </a:pPr>
-            <a:r>
-              <a:rPr sz="980" b="0" i="0" cap="none">
-                <a:solidFill>
-                  <a:srgbClr val="55503F"/>
-                </a:solidFill>
-                <a:latin typeface="Georgia"/>
-              </a:rPr>
-              <a:t>Росстат — возрастная структура районов;</a:t>
-            </a:r>
-            <a:endParaRPr sz="980" b="0" i="0" cap="none">
-              <a:solidFill>
-                <a:srgbClr val="55503F"/>
-              </a:solidFill>
-              <a:latin typeface="Georgia"/>
-            </a:endParaRPr>
-          </a:p>
-          <a:p>
-            <a:pPr algn="l">
-              <a:lnSpc>
-                <a:spcPct val="145000"/>
-              </a:lnSpc>
-              <a:spcAft>
-                <a:spcPts val="0"/>
-              </a:spcAft>
-            </a:pPr>
-            <a:r>
-              <a:rPr sz="980" b="0" i="0" cap="none">
-                <a:solidFill>
-                  <a:srgbClr val="55503F"/>
-                </a:solidFill>
-                <a:latin typeface="Georgia"/>
-              </a:rPr>
-              <a:t>членство КПРФ и ЛКСМ, состав кандидатов.</a:t>
-            </a:r>
-            <a:endParaRPr sz="980" b="0" i="0" cap="none">
-              <a:solidFill>
-                <a:srgbClr val="55503F"/>
-              </a:solidFill>
-              <a:latin typeface="Georgia"/>
-            </a:endParaRPr>
-          </a:p>
-        </p:txBody>
-      </p:sp>
-      <p:sp>
-        <p:nvSpPr>
-          <p:cNvPr id="817" name="TextBox 30"/>
-          <p:cNvSpPr txBox="1"/>
-          <p:nvPr/>
-        </p:nvSpPr>
-        <p:spPr>
-          <a:xfrm>
-            <a:off x="812800" y="6070600"/>
-            <a:ext cx="10972800" cy="266700"/>
-          </a:xfrm>
-          <a:prstGeom prst="rect">
-            <a:avLst/>
-          </a:prstGeom>
-        </p:spPr>
-        <p:txBody>
-          <a:bodyPr wrap="square">
-            <a:spAutoFit/>
-          </a:bodyPr>
-          <a:lstStyle/>
-          <a:p>
-            <a:pPr algn="l">
-              <a:lnSpc>
-                <a:spcPct val="125000"/>
-              </a:lnSpc>
-              <a:spcAft>
-                <a:spcPts val="0"/>
-              </a:spcAft>
-            </a:pPr>
-            <a:r>
-              <a:rPr sz="920" b="0" i="1" cap="none">
-                <a:solidFill>
-                  <a:srgbClr val="55503F"/>
-                </a:solidFill>
-                <a:latin typeface="Georgia"/>
-              </a:rPr>
-              <a:t>Ограничение: «рабочая молодёжь» — не одна группа. Данных по профессиям в открытом доступе мало, поэтому гипотеза проверяется косвенно — через возраст и район.</a:t>
-            </a:r>
-            <a:endParaRPr sz="920" b="0" i="1" cap="none">
+              <a:t>Теоретическая рамка: теория поколений (Маннгейм), когортное замещение (Инглхарт), кливаджи (Липсет–Роккан), делегитимация партий.</a:t>
+            </a:r>
+            <a:endParaRPr sz="940" b="0" i="1" cap="none">
               <a:solidFill>
                 <a:srgbClr val="55503F"/>
               </a:solidFill>
@@ -13135,7 +12966,7 @@
       </p:grpSpPr>
       <p:sp>
         <p:nvSpPr>
-          <p:cNvPr id="680" name="Rectangle 1"/>
+          <p:cNvPr id="788" name="Rectangle 1"/>
           <p:cNvSpPr/>
           <p:nvPr/>
         </p:nvSpPr>
@@ -13178,7 +13009,7 @@
       </p:sp>
       <p:sp>
         <p:nvSpPr>
-          <p:cNvPr id="681" name="TextBox 2"/>
+          <p:cNvPr id="789" name="TextBox 2"/>
           <p:cNvSpPr txBox="1"/>
           <p:nvPr/>
         </p:nvSpPr>
@@ -13212,14 +13043,14 @@
                 </a:solidFill>
                 <a:latin typeface="Consolas"/>
               </a:rPr>
-              <a:t>15 / ИТОГИ</a:t>
-            </a:r>
-          </a:p>
-        </p:txBody>
-      </p:sp>
-      <p:sp>
-        <p:nvSpPr>
-          <p:cNvPr id="682" name="TextBox 3"/>
+              <a:t>15 / ПРОВЕРКА</a:t>
+            </a:r>
+          </a:p>
+        </p:txBody>
+      </p:sp>
+      <p:sp>
+        <p:nvSpPr>
+          <p:cNvPr id="790" name="TextBox 3"/>
           <p:cNvSpPr txBox="1"/>
           <p:nvPr/>
         </p:nvSpPr>
@@ -13266,7 +13097,7 @@
       </p:sp>
       <p:sp>
         <p:nvSpPr>
-          <p:cNvPr id="683" name="TextBox 4"/>
+          <p:cNvPr id="791" name="TextBox 4"/>
           <p:cNvSpPr txBox="1"/>
           <p:nvPr/>
         </p:nvSpPr>
@@ -13300,7 +13131,7 @@
                 </a:solidFill>
                 <a:latin typeface="Bahnschrift SemiBold"/>
               </a:rPr>
-              <a:t>Что видно из комиссии</a:t>
+              <a:t>Как проверить гипотезу и что её опровергнет</a:t>
             </a:r>
             <a:endParaRPr sz="3100" b="0" i="0" cap="none">
               <a:solidFill>
@@ -13313,7 +13144,7 @@
       </p:sp>
       <p:sp>
         <p:nvSpPr>
-          <p:cNvPr id="684" name="Rectangle 5"/>
+          <p:cNvPr id="792" name="Rectangle 5"/>
           <p:cNvSpPr/>
           <p:nvPr/>
         </p:nvSpPr>
@@ -13356,7 +13187,7 @@
       </p:sp>
       <p:sp>
         <p:nvSpPr>
-          <p:cNvPr id="685" name="Rectangle 6"/>
+          <p:cNvPr id="793" name="Rectangle 6"/>
           <p:cNvSpPr/>
           <p:nvPr/>
         </p:nvSpPr>
@@ -13399,7 +13230,7 @@
       </p:sp>
       <p:sp>
         <p:nvSpPr>
-          <p:cNvPr id="687" name="TextBox 8"/>
+          <p:cNvPr id="795" name="TextBox 8"/>
           <p:cNvSpPr txBox="1"/>
           <p:nvPr/>
         </p:nvSpPr>
@@ -13433,27 +13264,544 @@
                 </a:solidFill>
                 <a:latin typeface="Consolas"/>
               </a:rPr>
-              <a:t>16 / 17</a:t>
-            </a:r>
-          </a:p>
-        </p:txBody>
-      </p:sp>
-      <p:sp>
-        <p:nvSpPr>
-          <p:cNvPr id="688" name="Rectangle 9"/>
+              <a:t>16 / 18</a:t>
+            </a:r>
+          </a:p>
+        </p:txBody>
+      </p:sp>
+      <p:sp>
+        <p:nvSpPr>
+          <p:cNvPr id="796" name="TextBox 9"/>
+          <p:cNvSpPr txBox="1"/>
+          <p:nvPr/>
+        </p:nvSpPr>
+        <p:spPr>
+          <a:xfrm>
+            <a:off x="812800" y="1854200"/>
+            <a:ext cx="5080000" cy="249174"/>
+          </a:xfrm>
+          <a:prstGeom prst="rect">
+            <a:avLst/>
+          </a:prstGeom>
+        </p:spPr>
+        <p:txBody>
+          <a:bodyPr wrap="square">
+            <a:spAutoFit/>
+          </a:bodyPr>
+          <a:lstStyle/>
+          <a:p>
+            <a:pPr algn="l">
+              <a:lnSpc>
+                <a:spcPct val="115000"/>
+              </a:lnSpc>
+              <a:spcAft>
+                <a:spcPts val="0"/>
+              </a:spcAft>
+            </a:pPr>
+            <a:r>
+              <a:rPr sz="900" b="0" i="0" cap="none" spc="200">
+                <a:solidFill>
+                  <a:srgbClr val="A82C1E"/>
+                </a:solidFill>
+                <a:latin typeface="Consolas"/>
+              </a:rPr>
+              <a:t>ЕСЛИ ГИПОТЕЗА ВЕРНА</a:t>
+            </a:r>
+            <a:endParaRPr sz="900" b="0" i="0" cap="none" spc="200">
+              <a:solidFill>
+                <a:srgbClr val="A82C1E"/>
+              </a:solidFill>
+              <a:latin typeface="Consolas"/>
+            </a:endParaRPr>
+          </a:p>
+        </p:txBody>
+      </p:sp>
+      <p:sp>
+        <p:nvSpPr>
+          <p:cNvPr id="797" name="TextBox 10"/>
+          <p:cNvSpPr txBox="1"/>
+          <p:nvPr/>
+        </p:nvSpPr>
+        <p:spPr>
+          <a:xfrm>
+            <a:off x="812800" y="2260600"/>
+            <a:ext cx="381000" cy="249174"/>
+          </a:xfrm>
+          <a:prstGeom prst="rect">
+            <a:avLst/>
+          </a:prstGeom>
+        </p:spPr>
+        <p:txBody>
+          <a:bodyPr wrap="square">
+            <a:spAutoFit/>
+          </a:bodyPr>
+          <a:lstStyle/>
+          <a:p>
+            <a:pPr algn="l">
+              <a:lnSpc>
+                <a:spcPct val="115000"/>
+              </a:lnSpc>
+              <a:spcAft>
+                <a:spcPts val="0"/>
+              </a:spcAft>
+            </a:pPr>
+            <a:r>
+              <a:rPr sz="900" b="0" i="0" cap="none">
+                <a:solidFill>
+                  <a:srgbClr val="A82C1E"/>
+                </a:solidFill>
+                <a:latin typeface="Consolas"/>
+              </a:rPr>
+              <a:t>01</a:t>
+            </a:r>
+            <a:endParaRPr sz="900" b="0" i="0" cap="none">
+              <a:solidFill>
+                <a:srgbClr val="A82C1E"/>
+              </a:solidFill>
+              <a:latin typeface="Consolas"/>
+            </a:endParaRPr>
+          </a:p>
+        </p:txBody>
+      </p:sp>
+      <p:sp>
+        <p:nvSpPr>
+          <p:cNvPr id="798" name="TextBox 11"/>
+          <p:cNvSpPr txBox="1"/>
+          <p:nvPr/>
+        </p:nvSpPr>
+        <p:spPr>
+          <a:xfrm>
+            <a:off x="1270000" y="2235200"/>
+            <a:ext cx="4572000" cy="301447"/>
+          </a:xfrm>
+          <a:prstGeom prst="rect">
+            <a:avLst/>
+          </a:prstGeom>
+        </p:spPr>
+        <p:txBody>
+          <a:bodyPr wrap="square">
+            <a:spAutoFit/>
+          </a:bodyPr>
+          <a:lstStyle/>
+          <a:p>
+            <a:pPr algn="l">
+              <a:lnSpc>
+                <a:spcPct val="130000"/>
+              </a:lnSpc>
+              <a:spcAft>
+                <a:spcPts val="0"/>
+              </a:spcAft>
+            </a:pPr>
+            <a:r>
+              <a:rPr sz="1060" b="0" i="0" cap="none">
+                <a:solidFill>
+                  <a:srgbClr val="1B1A18"/>
+                </a:solidFill>
+                <a:latin typeface="Georgia"/>
+              </a:rPr>
+              <a:t>Медианный возраст сторонников растёт от кампании к кампании.</a:t>
+            </a:r>
+            <a:endParaRPr sz="1060" b="0" i="0" cap="none">
+              <a:solidFill>
+                <a:srgbClr val="1B1A18"/>
+              </a:solidFill>
+              <a:latin typeface="Georgia"/>
+            </a:endParaRPr>
+          </a:p>
+        </p:txBody>
+      </p:sp>
+      <p:sp>
+        <p:nvSpPr>
+          <p:cNvPr id="799" name="TextBox 12"/>
+          <p:cNvSpPr txBox="1"/>
+          <p:nvPr/>
+        </p:nvSpPr>
+        <p:spPr>
+          <a:xfrm>
+            <a:off x="812800" y="2971800"/>
+            <a:ext cx="381000" cy="249174"/>
+          </a:xfrm>
+          <a:prstGeom prst="rect">
+            <a:avLst/>
+          </a:prstGeom>
+        </p:spPr>
+        <p:txBody>
+          <a:bodyPr wrap="square">
+            <a:spAutoFit/>
+          </a:bodyPr>
+          <a:lstStyle/>
+          <a:p>
+            <a:pPr algn="l">
+              <a:lnSpc>
+                <a:spcPct val="115000"/>
+              </a:lnSpc>
+              <a:spcAft>
+                <a:spcPts val="0"/>
+              </a:spcAft>
+            </a:pPr>
+            <a:r>
+              <a:rPr sz="900" b="0" i="0" cap="none">
+                <a:solidFill>
+                  <a:srgbClr val="A82C1E"/>
+                </a:solidFill>
+                <a:latin typeface="Consolas"/>
+              </a:rPr>
+              <a:t>02</a:t>
+            </a:r>
+            <a:endParaRPr sz="900" b="0" i="0" cap="none">
+              <a:solidFill>
+                <a:srgbClr val="A82C1E"/>
+              </a:solidFill>
+              <a:latin typeface="Consolas"/>
+            </a:endParaRPr>
+          </a:p>
+        </p:txBody>
+      </p:sp>
+      <p:sp>
+        <p:nvSpPr>
+          <p:cNvPr id="800" name="TextBox 13"/>
+          <p:cNvSpPr txBox="1"/>
+          <p:nvPr/>
+        </p:nvSpPr>
+        <p:spPr>
+          <a:xfrm>
+            <a:off x="1270000" y="2946400"/>
+            <a:ext cx="4572000" cy="301447"/>
+          </a:xfrm>
+          <a:prstGeom prst="rect">
+            <a:avLst/>
+          </a:prstGeom>
+        </p:spPr>
+        <p:txBody>
+          <a:bodyPr wrap="square">
+            <a:spAutoFit/>
+          </a:bodyPr>
+          <a:lstStyle/>
+          <a:p>
+            <a:pPr algn="l">
+              <a:lnSpc>
+                <a:spcPct val="130000"/>
+              </a:lnSpc>
+              <a:spcAft>
+                <a:spcPts val="0"/>
+              </a:spcAft>
+            </a:pPr>
+            <a:r>
+              <a:rPr sz="1060" b="0" i="0" cap="none">
+                <a:solidFill>
+                  <a:srgbClr val="1B1A18"/>
+                </a:solidFill>
+                <a:latin typeface="Georgia"/>
+              </a:rPr>
+              <a:t>Абсолютные голоса стагнируют, а доля падает при росте явки.</a:t>
+            </a:r>
+            <a:endParaRPr sz="1060" b="0" i="0" cap="none">
+              <a:solidFill>
+                <a:srgbClr val="1B1A18"/>
+              </a:solidFill>
+              <a:latin typeface="Georgia"/>
+            </a:endParaRPr>
+          </a:p>
+        </p:txBody>
+      </p:sp>
+      <p:sp>
+        <p:nvSpPr>
+          <p:cNvPr id="801" name="TextBox 14"/>
+          <p:cNvSpPr txBox="1"/>
+          <p:nvPr/>
+        </p:nvSpPr>
+        <p:spPr>
+          <a:xfrm>
+            <a:off x="812800" y="3683000"/>
+            <a:ext cx="381000" cy="249174"/>
+          </a:xfrm>
+          <a:prstGeom prst="rect">
+            <a:avLst/>
+          </a:prstGeom>
+        </p:spPr>
+        <p:txBody>
+          <a:bodyPr wrap="square">
+            <a:spAutoFit/>
+          </a:bodyPr>
+          <a:lstStyle/>
+          <a:p>
+            <a:pPr algn="l">
+              <a:lnSpc>
+                <a:spcPct val="115000"/>
+              </a:lnSpc>
+              <a:spcAft>
+                <a:spcPts val="0"/>
+              </a:spcAft>
+            </a:pPr>
+            <a:r>
+              <a:rPr sz="900" b="0" i="0" cap="none">
+                <a:solidFill>
+                  <a:srgbClr val="A82C1E"/>
+                </a:solidFill>
+                <a:latin typeface="Consolas"/>
+              </a:rPr>
+              <a:t>03</a:t>
+            </a:r>
+            <a:endParaRPr sz="900" b="0" i="0" cap="none">
+              <a:solidFill>
+                <a:srgbClr val="A82C1E"/>
+              </a:solidFill>
+              <a:latin typeface="Consolas"/>
+            </a:endParaRPr>
+          </a:p>
+        </p:txBody>
+      </p:sp>
+      <p:sp>
+        <p:nvSpPr>
+          <p:cNvPr id="802" name="TextBox 15"/>
+          <p:cNvSpPr txBox="1"/>
+          <p:nvPr/>
+        </p:nvSpPr>
+        <p:spPr>
+          <a:xfrm>
+            <a:off x="1270000" y="3657600"/>
+            <a:ext cx="4572000" cy="301447"/>
+          </a:xfrm>
+          <a:prstGeom prst="rect">
+            <a:avLst/>
+          </a:prstGeom>
+        </p:spPr>
+        <p:txBody>
+          <a:bodyPr wrap="square">
+            <a:spAutoFit/>
+          </a:bodyPr>
+          <a:lstStyle/>
+          <a:p>
+            <a:pPr algn="l">
+              <a:lnSpc>
+                <a:spcPct val="130000"/>
+              </a:lnSpc>
+              <a:spcAft>
+                <a:spcPts val="0"/>
+              </a:spcAft>
+            </a:pPr>
+            <a:r>
+              <a:rPr sz="1060" b="0" i="0" cap="none">
+                <a:solidFill>
+                  <a:srgbClr val="1B1A18"/>
+                </a:solidFill>
+                <a:latin typeface="Georgia"/>
+              </a:rPr>
+              <a:t>Поддержка 18–34 ниже средней по партии в разы.</a:t>
+            </a:r>
+            <a:endParaRPr sz="1060" b="0" i="0" cap="none">
+              <a:solidFill>
+                <a:srgbClr val="1B1A18"/>
+              </a:solidFill>
+              <a:latin typeface="Georgia"/>
+            </a:endParaRPr>
+          </a:p>
+        </p:txBody>
+      </p:sp>
+      <p:sp>
+        <p:nvSpPr>
+          <p:cNvPr id="803" name="TextBox 16"/>
+          <p:cNvSpPr txBox="1"/>
+          <p:nvPr/>
+        </p:nvSpPr>
+        <p:spPr>
+          <a:xfrm>
+            <a:off x="812800" y="4394200"/>
+            <a:ext cx="381000" cy="249174"/>
+          </a:xfrm>
+          <a:prstGeom prst="rect">
+            <a:avLst/>
+          </a:prstGeom>
+        </p:spPr>
+        <p:txBody>
+          <a:bodyPr wrap="square">
+            <a:spAutoFit/>
+          </a:bodyPr>
+          <a:lstStyle/>
+          <a:p>
+            <a:pPr algn="l">
+              <a:lnSpc>
+                <a:spcPct val="115000"/>
+              </a:lnSpc>
+              <a:spcAft>
+                <a:spcPts val="0"/>
+              </a:spcAft>
+            </a:pPr>
+            <a:r>
+              <a:rPr sz="900" b="0" i="0" cap="none">
+                <a:solidFill>
+                  <a:srgbClr val="A82C1E"/>
+                </a:solidFill>
+                <a:latin typeface="Consolas"/>
+              </a:rPr>
+              <a:t>04</a:t>
+            </a:r>
+            <a:endParaRPr sz="900" b="0" i="0" cap="none">
+              <a:solidFill>
+                <a:srgbClr val="A82C1E"/>
+              </a:solidFill>
+              <a:latin typeface="Consolas"/>
+            </a:endParaRPr>
+          </a:p>
+        </p:txBody>
+      </p:sp>
+      <p:sp>
+        <p:nvSpPr>
+          <p:cNvPr id="804" name="TextBox 17"/>
+          <p:cNvSpPr txBox="1"/>
+          <p:nvPr/>
+        </p:nvSpPr>
+        <p:spPr>
+          <a:xfrm>
+            <a:off x="1270000" y="4368800"/>
+            <a:ext cx="4572000" cy="511454"/>
+          </a:xfrm>
+          <a:prstGeom prst="rect">
+            <a:avLst/>
+          </a:prstGeom>
+        </p:spPr>
+        <p:txBody>
+          <a:bodyPr wrap="square">
+            <a:spAutoFit/>
+          </a:bodyPr>
+          <a:lstStyle/>
+          <a:p>
+            <a:pPr algn="l">
+              <a:lnSpc>
+                <a:spcPct val="130000"/>
+              </a:lnSpc>
+              <a:spcAft>
+                <a:spcPts val="0"/>
+              </a:spcAft>
+            </a:pPr>
+            <a:r>
+              <a:rPr sz="1060" b="0" i="0" cap="none">
+                <a:solidFill>
+                  <a:srgbClr val="1B1A18"/>
+                </a:solidFill>
+                <a:latin typeface="Georgia"/>
+              </a:rPr>
+              <a:t>В новых районах с молодой структурой результат ниже, чем в старых спальных.</a:t>
+            </a:r>
+            <a:endParaRPr sz="1060" b="0" i="0" cap="none">
+              <a:solidFill>
+                <a:srgbClr val="1B1A18"/>
+              </a:solidFill>
+              <a:latin typeface="Georgia"/>
+            </a:endParaRPr>
+          </a:p>
+        </p:txBody>
+      </p:sp>
+      <p:sp>
+        <p:nvSpPr>
+          <p:cNvPr id="805" name="TextBox 18"/>
+          <p:cNvSpPr txBox="1"/>
+          <p:nvPr/>
+        </p:nvSpPr>
+        <p:spPr>
+          <a:xfrm>
+            <a:off x="812800" y="5105400"/>
+            <a:ext cx="381000" cy="249174"/>
+          </a:xfrm>
+          <a:prstGeom prst="rect">
+            <a:avLst/>
+          </a:prstGeom>
+        </p:spPr>
+        <p:txBody>
+          <a:bodyPr wrap="square">
+            <a:spAutoFit/>
+          </a:bodyPr>
+          <a:lstStyle/>
+          <a:p>
+            <a:pPr algn="l">
+              <a:lnSpc>
+                <a:spcPct val="115000"/>
+              </a:lnSpc>
+              <a:spcAft>
+                <a:spcPts val="0"/>
+              </a:spcAft>
+            </a:pPr>
+            <a:r>
+              <a:rPr sz="900" b="0" i="0" cap="none">
+                <a:solidFill>
+                  <a:srgbClr val="A82C1E"/>
+                </a:solidFill>
+                <a:latin typeface="Consolas"/>
+              </a:rPr>
+              <a:t>05</a:t>
+            </a:r>
+            <a:endParaRPr sz="900" b="0" i="0" cap="none">
+              <a:solidFill>
+                <a:srgbClr val="A82C1E"/>
+              </a:solidFill>
+              <a:latin typeface="Consolas"/>
+            </a:endParaRPr>
+          </a:p>
+        </p:txBody>
+      </p:sp>
+      <p:sp>
+        <p:nvSpPr>
+          <p:cNvPr id="806" name="TextBox 19"/>
+          <p:cNvSpPr txBox="1"/>
+          <p:nvPr/>
+        </p:nvSpPr>
+        <p:spPr>
+          <a:xfrm>
+            <a:off x="1270000" y="5080000"/>
+            <a:ext cx="4572000" cy="301447"/>
+          </a:xfrm>
+          <a:prstGeom prst="rect">
+            <a:avLst/>
+          </a:prstGeom>
+        </p:spPr>
+        <p:txBody>
+          <a:bodyPr wrap="square">
+            <a:spAutoFit/>
+          </a:bodyPr>
+          <a:lstStyle/>
+          <a:p>
+            <a:pPr algn="l">
+              <a:lnSpc>
+                <a:spcPct val="130000"/>
+              </a:lnSpc>
+              <a:spcAft>
+                <a:spcPts val="0"/>
+              </a:spcAft>
+            </a:pPr>
+            <a:r>
+              <a:rPr sz="1060" b="0" i="0" cap="none">
+                <a:solidFill>
+                  <a:srgbClr val="1B1A18"/>
+                </a:solidFill>
+                <a:latin typeface="Georgia"/>
+              </a:rPr>
+              <a:t>Приток в партию и ЛКСМ не компенсирует выбытие.</a:t>
+            </a:r>
+            <a:endParaRPr sz="1060" b="0" i="0" cap="none">
+              <a:solidFill>
+                <a:srgbClr val="1B1A18"/>
+              </a:solidFill>
+              <a:latin typeface="Georgia"/>
+            </a:endParaRPr>
+          </a:p>
+        </p:txBody>
+      </p:sp>
+      <p:sp>
+        <p:nvSpPr>
+          <p:cNvPr id="807" name="Rectangle 20"/>
           <p:cNvSpPr/>
           <p:nvPr/>
         </p:nvSpPr>
         <p:spPr>
           <a:xfrm>
-            <a:off x="812800" y="1879600"/>
-            <a:ext cx="10972800" cy="9525"/>
+            <a:off x="6350000" y="1854200"/>
+            <a:ext cx="12700" cy="4064000"/>
           </a:xfrm>
           <a:prstGeom prst="rect">
             <a:avLst/>
           </a:prstGeom>
           <a:solidFill>
-            <a:srgbClr val="DED3B7"/>
+            <a:srgbClr val="1B1A18"/>
           </a:solidFill>
           <a:ln>
             <a:noFill/>
@@ -13483,14 +13831,14 @@
       </p:sp>
       <p:sp>
         <p:nvSpPr>
-          <p:cNvPr id="689" name="TextBox 10"/>
-          <p:cNvSpPr txBox="1"/>
-          <p:nvPr/>
-        </p:nvSpPr>
-        <p:spPr>
-          <a:xfrm>
-            <a:off x="812800" y="2032000"/>
-            <a:ext cx="508000" cy="266700"/>
+          <p:cNvPr id="808" name="TextBox 21"/>
+          <p:cNvSpPr txBox="1"/>
+          <p:nvPr/>
+        </p:nvSpPr>
+        <p:spPr>
+          <a:xfrm>
+            <a:off x="6654800" y="1854200"/>
+            <a:ext cx="4318000" cy="249174"/>
           </a:xfrm>
           <a:prstGeom prst="rect">
             <a:avLst/>
@@ -13511,15 +13859,15 @@
               </a:spcAft>
             </a:pPr>
             <a:r>
-              <a:rPr sz="1000" b="0" i="0" cap="none">
+              <a:rPr sz="900" b="0" i="0" cap="none" spc="200">
                 <a:solidFill>
                   <a:srgbClr val="A82C1E"/>
                 </a:solidFill>
                 <a:latin typeface="Consolas"/>
               </a:rPr>
-              <a:t>01</a:t>
-            </a:r>
-            <a:endParaRPr sz="1000" b="0" i="0" cap="none">
+              <a:t>ЧТО ОПРОВЕРГНЕТ</a:t>
+            </a:r>
+            <a:endParaRPr sz="900" b="0" i="0" cap="none" spc="200">
               <a:solidFill>
                 <a:srgbClr val="A82C1E"/>
               </a:solidFill>
@@ -13530,14 +13878,14 @@
       </p:sp>
       <p:sp>
         <p:nvSpPr>
-          <p:cNvPr id="690" name="TextBox 11"/>
-          <p:cNvSpPr txBox="1"/>
-          <p:nvPr/>
-        </p:nvSpPr>
-        <p:spPr>
-          <a:xfrm>
-            <a:off x="1422400" y="1981200"/>
-            <a:ext cx="4572000" cy="310515"/>
+          <p:cNvPr id="809" name="TextBox 22"/>
+          <p:cNvSpPr txBox="1"/>
+          <p:nvPr/>
+        </p:nvSpPr>
+        <p:spPr>
+          <a:xfrm>
+            <a:off x="6654800" y="2235200"/>
+            <a:ext cx="254000" cy="284226"/>
           </a:xfrm>
           <a:prstGeom prst="rect">
             <a:avLst/>
@@ -13558,33 +13906,424 @@
               </a:spcAft>
             </a:pPr>
             <a:r>
-              <a:rPr sz="1250" b="0" i="0" cap="none">
+              <a:rPr sz="1100" b="0" i="0" cap="none">
+                <a:solidFill>
+                  <a:srgbClr val="A82C1E"/>
+                </a:solidFill>
+                <a:latin typeface="Georgia"/>
+              </a:rPr>
+              <a:t>—</a:t>
+            </a:r>
+            <a:endParaRPr sz="1100" b="0" i="0" cap="none">
+              <a:solidFill>
+                <a:srgbClr val="A82C1E"/>
+              </a:solidFill>
+              <a:latin typeface="Georgia"/>
+            </a:endParaRPr>
+          </a:p>
+        </p:txBody>
+      </p:sp>
+      <p:sp>
+        <p:nvSpPr>
+          <p:cNvPr id="810" name="TextBox 23"/>
+          <p:cNvSpPr txBox="1"/>
+          <p:nvPr/>
+        </p:nvSpPr>
+        <p:spPr>
+          <a:xfrm>
+            <a:off x="6959600" y="2235200"/>
+            <a:ext cx="4267200" cy="297485"/>
+          </a:xfrm>
+          <a:prstGeom prst="rect">
+            <a:avLst/>
+          </a:prstGeom>
+        </p:spPr>
+        <p:txBody>
+          <a:bodyPr wrap="square">
+            <a:spAutoFit/>
+          </a:bodyPr>
+          <a:lstStyle/>
+          <a:p>
+            <a:pPr algn="l">
+              <a:lnSpc>
+                <a:spcPct val="130000"/>
+              </a:lnSpc>
+              <a:spcAft>
+                <a:spcPts val="0"/>
+              </a:spcAft>
+            </a:pPr>
+            <a:r>
+              <a:rPr sz="1040" b="0" i="0" cap="none">
                 <a:solidFill>
                   <a:srgbClr val="1B1A18"/>
                 </a:solidFill>
-                <a:latin typeface="Bahnschrift SemiBold"/>
-              </a:rPr>
-              <a:t>Ядро приходит стабильно — и стареет</a:t>
-            </a:r>
-            <a:endParaRPr sz="1250" b="0" i="0" cap="none">
+                <a:latin typeface="Georgia"/>
+              </a:rPr>
+              <a:t>Рост абсолютных голосов при росте явки.</a:t>
+            </a:r>
+            <a:endParaRPr sz="1040" b="0" i="0" cap="none">
               <a:solidFill>
                 <a:srgbClr val="1B1A18"/>
               </a:solidFill>
-              <a:latin typeface="Bahnschrift SemiBold"/>
-            </a:endParaRPr>
-          </a:p>
-        </p:txBody>
-      </p:sp>
-      <p:sp>
-        <p:nvSpPr>
-          <p:cNvPr id="691" name="TextBox 12"/>
-          <p:cNvSpPr txBox="1"/>
-          <p:nvPr/>
-        </p:nvSpPr>
-        <p:spPr>
-          <a:xfrm>
-            <a:off x="6096000" y="1981200"/>
-            <a:ext cx="5689600" cy="278130"/>
+              <a:latin typeface="Georgia"/>
+            </a:endParaRPr>
+          </a:p>
+        </p:txBody>
+      </p:sp>
+      <p:sp>
+        <p:nvSpPr>
+          <p:cNvPr id="811" name="TextBox 24"/>
+          <p:cNvSpPr txBox="1"/>
+          <p:nvPr/>
+        </p:nvSpPr>
+        <p:spPr>
+          <a:xfrm>
+            <a:off x="6654800" y="2794000"/>
+            <a:ext cx="254000" cy="284226"/>
+          </a:xfrm>
+          <a:prstGeom prst="rect">
+            <a:avLst/>
+          </a:prstGeom>
+        </p:spPr>
+        <p:txBody>
+          <a:bodyPr wrap="square">
+            <a:spAutoFit/>
+          </a:bodyPr>
+          <a:lstStyle/>
+          <a:p>
+            <a:pPr algn="l">
+              <a:lnSpc>
+                <a:spcPct val="115000"/>
+              </a:lnSpc>
+              <a:spcAft>
+                <a:spcPts val="0"/>
+              </a:spcAft>
+            </a:pPr>
+            <a:r>
+              <a:rPr sz="1100" b="0" i="0" cap="none">
+                <a:solidFill>
+                  <a:srgbClr val="A82C1E"/>
+                </a:solidFill>
+                <a:latin typeface="Georgia"/>
+              </a:rPr>
+              <a:t>—</a:t>
+            </a:r>
+            <a:endParaRPr sz="1100" b="0" i="0" cap="none">
+              <a:solidFill>
+                <a:srgbClr val="A82C1E"/>
+              </a:solidFill>
+              <a:latin typeface="Georgia"/>
+            </a:endParaRPr>
+          </a:p>
+        </p:txBody>
+      </p:sp>
+      <p:sp>
+        <p:nvSpPr>
+          <p:cNvPr id="812" name="TextBox 25"/>
+          <p:cNvSpPr txBox="1"/>
+          <p:nvPr/>
+        </p:nvSpPr>
+        <p:spPr>
+          <a:xfrm>
+            <a:off x="6959600" y="2794000"/>
+            <a:ext cx="4267200" cy="297485"/>
+          </a:xfrm>
+          <a:prstGeom prst="rect">
+            <a:avLst/>
+          </a:prstGeom>
+        </p:spPr>
+        <p:txBody>
+          <a:bodyPr wrap="square">
+            <a:spAutoFit/>
+          </a:bodyPr>
+          <a:lstStyle/>
+          <a:p>
+            <a:pPr algn="l">
+              <a:lnSpc>
+                <a:spcPct val="130000"/>
+              </a:lnSpc>
+              <a:spcAft>
+                <a:spcPts val="0"/>
+              </a:spcAft>
+            </a:pPr>
+            <a:r>
+              <a:rPr sz="1040" b="0" i="0" cap="none">
+                <a:solidFill>
+                  <a:srgbClr val="1B1A18"/>
+                </a:solidFill>
+                <a:latin typeface="Georgia"/>
+              </a:rPr>
+              <a:t>Рост поддержки именно среди рабочей молодёжи.</a:t>
+            </a:r>
+            <a:endParaRPr sz="1040" b="0" i="0" cap="none">
+              <a:solidFill>
+                <a:srgbClr val="1B1A18"/>
+              </a:solidFill>
+              <a:latin typeface="Georgia"/>
+            </a:endParaRPr>
+          </a:p>
+        </p:txBody>
+      </p:sp>
+      <p:sp>
+        <p:nvSpPr>
+          <p:cNvPr id="813" name="TextBox 26"/>
+          <p:cNvSpPr txBox="1"/>
+          <p:nvPr/>
+        </p:nvSpPr>
+        <p:spPr>
+          <a:xfrm>
+            <a:off x="6654800" y="3352800"/>
+            <a:ext cx="254000" cy="284226"/>
+          </a:xfrm>
+          <a:prstGeom prst="rect">
+            <a:avLst/>
+          </a:prstGeom>
+        </p:spPr>
+        <p:txBody>
+          <a:bodyPr wrap="square">
+            <a:spAutoFit/>
+          </a:bodyPr>
+          <a:lstStyle/>
+          <a:p>
+            <a:pPr algn="l">
+              <a:lnSpc>
+                <a:spcPct val="115000"/>
+              </a:lnSpc>
+              <a:spcAft>
+                <a:spcPts val="0"/>
+              </a:spcAft>
+            </a:pPr>
+            <a:r>
+              <a:rPr sz="1100" b="0" i="0" cap="none">
+                <a:solidFill>
+                  <a:srgbClr val="A82C1E"/>
+                </a:solidFill>
+                <a:latin typeface="Georgia"/>
+              </a:rPr>
+              <a:t>—</a:t>
+            </a:r>
+            <a:endParaRPr sz="1100" b="0" i="0" cap="none">
+              <a:solidFill>
+                <a:srgbClr val="A82C1E"/>
+              </a:solidFill>
+              <a:latin typeface="Georgia"/>
+            </a:endParaRPr>
+          </a:p>
+        </p:txBody>
+      </p:sp>
+      <p:sp>
+        <p:nvSpPr>
+          <p:cNvPr id="814" name="TextBox 27"/>
+          <p:cNvSpPr txBox="1"/>
+          <p:nvPr/>
+        </p:nvSpPr>
+        <p:spPr>
+          <a:xfrm>
+            <a:off x="6959600" y="3352800"/>
+            <a:ext cx="4267200" cy="297485"/>
+          </a:xfrm>
+          <a:prstGeom prst="rect">
+            <a:avLst/>
+          </a:prstGeom>
+        </p:spPr>
+        <p:txBody>
+          <a:bodyPr wrap="square">
+            <a:spAutoFit/>
+          </a:bodyPr>
+          <a:lstStyle/>
+          <a:p>
+            <a:pPr algn="l">
+              <a:lnSpc>
+                <a:spcPct val="130000"/>
+              </a:lnSpc>
+              <a:spcAft>
+                <a:spcPts val="0"/>
+              </a:spcAft>
+            </a:pPr>
+            <a:r>
+              <a:rPr sz="1040" b="0" i="0" cap="none">
+                <a:solidFill>
+                  <a:srgbClr val="1B1A18"/>
+                </a:solidFill>
+                <a:latin typeface="Georgia"/>
+              </a:rPr>
+              <a:t>Омоложение членства и списков кандидатов.</a:t>
+            </a:r>
+            <a:endParaRPr sz="1040" b="0" i="0" cap="none">
+              <a:solidFill>
+                <a:srgbClr val="1B1A18"/>
+              </a:solidFill>
+              <a:latin typeface="Georgia"/>
+            </a:endParaRPr>
+          </a:p>
+        </p:txBody>
+      </p:sp>
+      <p:sp>
+        <p:nvSpPr>
+          <p:cNvPr id="815" name="TextBox 28"/>
+          <p:cNvSpPr txBox="1"/>
+          <p:nvPr/>
+        </p:nvSpPr>
+        <p:spPr>
+          <a:xfrm>
+            <a:off x="6654800" y="4064000"/>
+            <a:ext cx="4318000" cy="249174"/>
+          </a:xfrm>
+          <a:prstGeom prst="rect">
+            <a:avLst/>
+          </a:prstGeom>
+        </p:spPr>
+        <p:txBody>
+          <a:bodyPr wrap="square">
+            <a:spAutoFit/>
+          </a:bodyPr>
+          <a:lstStyle/>
+          <a:p>
+            <a:pPr algn="l">
+              <a:lnSpc>
+                <a:spcPct val="115000"/>
+              </a:lnSpc>
+              <a:spcAft>
+                <a:spcPts val="0"/>
+              </a:spcAft>
+            </a:pPr>
+            <a:r>
+              <a:rPr sz="900" b="0" i="0" cap="none" spc="200">
+                <a:solidFill>
+                  <a:srgbClr val="A82C1E"/>
+                </a:solidFill>
+                <a:latin typeface="Consolas"/>
+              </a:rPr>
+              <a:t>ЧЕМ ПРОВЕРЯТЬ</a:t>
+            </a:r>
+            <a:endParaRPr sz="900" b="0" i="0" cap="none" spc="200">
+              <a:solidFill>
+                <a:srgbClr val="A82C1E"/>
+              </a:solidFill>
+              <a:latin typeface="Consolas"/>
+            </a:endParaRPr>
+          </a:p>
+        </p:txBody>
+      </p:sp>
+      <p:sp>
+        <p:nvSpPr>
+          <p:cNvPr id="816" name="TextBox 29"/>
+          <p:cNvSpPr txBox="1"/>
+          <p:nvPr/>
+        </p:nvSpPr>
+        <p:spPr>
+          <a:xfrm>
+            <a:off x="6654800" y="4368800"/>
+            <a:ext cx="4318000" cy="1107034"/>
+          </a:xfrm>
+          <a:prstGeom prst="rect">
+            <a:avLst/>
+          </a:prstGeom>
+        </p:spPr>
+        <p:txBody>
+          <a:bodyPr wrap="square">
+            <a:spAutoFit/>
+          </a:bodyPr>
+          <a:lstStyle/>
+          <a:p>
+            <a:pPr algn="l">
+              <a:lnSpc>
+                <a:spcPct val="145000"/>
+              </a:lnSpc>
+              <a:spcAft>
+                <a:spcPts val="0"/>
+              </a:spcAft>
+            </a:pPr>
+            <a:r>
+              <a:rPr sz="980" b="0" i="0" cap="none">
+                <a:solidFill>
+                  <a:srgbClr val="55503F"/>
+                </a:solidFill>
+                <a:latin typeface="Georgia"/>
+              </a:rPr>
+              <a:t>Протоколы УИК и явка по участкам;</a:t>
+            </a:r>
+          </a:p>
+          <a:p>
+            <a:pPr algn="l">
+              <a:lnSpc>
+                <a:spcPct val="145000"/>
+              </a:lnSpc>
+              <a:spcAft>
+                <a:spcPts val="0"/>
+              </a:spcAft>
+            </a:pPr>
+            <a:r>
+              <a:rPr sz="980" b="0" i="0" cap="none">
+                <a:solidFill>
+                  <a:srgbClr val="55503F"/>
+                </a:solidFill>
+                <a:latin typeface="Georgia"/>
+              </a:rPr>
+              <a:t>exit poll и Левада по возрастам;</a:t>
+            </a:r>
+          </a:p>
+          <a:p>
+            <a:pPr algn="l">
+              <a:lnSpc>
+                <a:spcPct val="145000"/>
+              </a:lnSpc>
+              <a:spcAft>
+                <a:spcPts val="0"/>
+              </a:spcAft>
+            </a:pPr>
+            <a:r>
+              <a:rPr sz="980" b="0" i="0" cap="none">
+                <a:solidFill>
+                  <a:srgbClr val="55503F"/>
+                </a:solidFill>
+                <a:latin typeface="Georgia"/>
+              </a:rPr>
+              <a:t>Росстат — возрастная структура районов;</a:t>
+            </a:r>
+          </a:p>
+          <a:p>
+            <a:pPr algn="l">
+              <a:lnSpc>
+                <a:spcPct val="145000"/>
+              </a:lnSpc>
+              <a:spcAft>
+                <a:spcPts val="0"/>
+              </a:spcAft>
+            </a:pPr>
+            <a:r>
+              <a:rPr sz="980" b="0" i="0" cap="none">
+                <a:solidFill>
+                  <a:srgbClr val="55503F"/>
+                </a:solidFill>
+                <a:latin typeface="Georgia"/>
+              </a:rPr>
+              <a:t>APC-декомпозиция: возраст — период — когорта;</a:t>
+            </a:r>
+          </a:p>
+          <a:p>
+            <a:r>
+              <a:rPr sz="980" b="0" i="0" cap="none">
+                <a:solidFill>
+                  <a:srgbClr val="55503F"/>
+                </a:solidFill>
+                <a:latin typeface="Georgia"/>
+              </a:rPr>
+              <a:t>членство КПРФ и ЛКСМ, состав кандидатов.</a:t>
+            </a:r>
+          </a:p>
+        </p:txBody>
+      </p:sp>
+      <p:sp>
+        <p:nvSpPr>
+          <p:cNvPr id="817" name="TextBox 30"/>
+          <p:cNvSpPr txBox="1"/>
+          <p:nvPr/>
+        </p:nvSpPr>
+        <p:spPr>
+          <a:xfrm>
+            <a:off x="812800" y="6070600"/>
+            <a:ext cx="10972800" cy="266700"/>
           </a:xfrm>
           <a:prstGeom prst="rect">
             <a:avLst/>
@@ -13605,751 +14344,15 @@
               </a:spcAft>
             </a:pPr>
             <a:r>
-              <a:rPr sz="980" b="0" i="0" cap="none">
+              <a:rPr sz="920" b="0" i="1" cap="none">
                 <a:solidFill>
                   <a:srgbClr val="55503F"/>
                 </a:solidFill>
                 <a:latin typeface="Georgia"/>
               </a:rPr>
-              <a:t>Одни и те же лица каждые выборы: 70% сторонников КПРФ — старше 55 лет.</a:t>
-            </a:r>
-            <a:endParaRPr sz="980" b="0" i="0" cap="none">
-              <a:solidFill>
-                <a:srgbClr val="55503F"/>
-              </a:solidFill>
-              <a:latin typeface="Georgia"/>
-            </a:endParaRPr>
-          </a:p>
-        </p:txBody>
-      </p:sp>
-      <p:sp>
-        <p:nvSpPr>
-          <p:cNvPr id="692" name="Rectangle 13"/>
-          <p:cNvSpPr/>
-          <p:nvPr/>
-        </p:nvSpPr>
-        <p:spPr>
-          <a:xfrm>
-            <a:off x="812800" y="2667000"/>
-            <a:ext cx="10972800" cy="9525"/>
-          </a:xfrm>
-          <a:prstGeom prst="rect">
-            <a:avLst/>
-          </a:prstGeom>
-          <a:solidFill>
-            <a:srgbClr val="DED3B7"/>
-          </a:solidFill>
-          <a:ln>
-            <a:noFill/>
-          </a:ln>
-        </p:spPr>
-        <p:style>
-          <a:lnRef idx="2">
-            <a:schemeClr val="accent1">
-              <a:shade val="50000"/>
-            </a:schemeClr>
-          </a:lnRef>
-          <a:fillRef idx="1">
-            <a:schemeClr val="accent1"/>
-          </a:fillRef>
-          <a:effectRef idx="0">
-            <a:schemeClr val="accent1"/>
-          </a:effectRef>
-          <a:fontRef idx="minor">
-            <a:schemeClr val="lt1"/>
-          </a:fontRef>
-        </p:style>
-        <p:txBody>
-          <a:bodyPr anchor="ctr"/>
-          <a:lstStyle/>
-          <a:p/>
-        </p:txBody>
-      </p:sp>
-      <p:sp>
-        <p:nvSpPr>
-          <p:cNvPr id="693" name="TextBox 14"/>
-          <p:cNvSpPr txBox="1"/>
-          <p:nvPr/>
-        </p:nvSpPr>
-        <p:spPr>
-          <a:xfrm>
-            <a:off x="812800" y="2819400"/>
-            <a:ext cx="508000" cy="266700"/>
-          </a:xfrm>
-          <a:prstGeom prst="rect">
-            <a:avLst/>
-          </a:prstGeom>
-        </p:spPr>
-        <p:txBody>
-          <a:bodyPr wrap="square">
-            <a:spAutoFit/>
-          </a:bodyPr>
-          <a:lstStyle/>
-          <a:p>
-            <a:pPr algn="l">
-              <a:lnSpc>
-                <a:spcPct val="115000"/>
-              </a:lnSpc>
-              <a:spcAft>
-                <a:spcPts val="0"/>
-              </a:spcAft>
-            </a:pPr>
-            <a:r>
-              <a:rPr sz="1000" b="0" i="0" cap="none">
-                <a:solidFill>
-                  <a:srgbClr val="A82C1E"/>
-                </a:solidFill>
-                <a:latin typeface="Consolas"/>
-              </a:rPr>
-              <a:t>02</a:t>
-            </a:r>
-            <a:endParaRPr sz="1000" b="0" i="0" cap="none">
-              <a:solidFill>
-                <a:srgbClr val="A82C1E"/>
-              </a:solidFill>
-              <a:latin typeface="Consolas"/>
-            </a:endParaRPr>
-          </a:p>
-        </p:txBody>
-      </p:sp>
-      <p:sp>
-        <p:nvSpPr>
-          <p:cNvPr id="694" name="TextBox 15"/>
-          <p:cNvSpPr txBox="1"/>
-          <p:nvPr/>
-        </p:nvSpPr>
-        <p:spPr>
-          <a:xfrm>
-            <a:off x="1422400" y="2768600"/>
-            <a:ext cx="4572000" cy="310515"/>
-          </a:xfrm>
-          <a:prstGeom prst="rect">
-            <a:avLst/>
-          </a:prstGeom>
-        </p:spPr>
-        <p:txBody>
-          <a:bodyPr wrap="square">
-            <a:spAutoFit/>
-          </a:bodyPr>
-          <a:lstStyle/>
-          <a:p>
-            <a:pPr algn="l">
-              <a:lnSpc>
-                <a:spcPct val="115000"/>
-              </a:lnSpc>
-              <a:spcAft>
-                <a:spcPts val="0"/>
-              </a:spcAft>
-            </a:pPr>
-            <a:r>
-              <a:rPr sz="1250" b="0" i="0" cap="none">
-                <a:solidFill>
-                  <a:srgbClr val="1B1A18"/>
-                </a:solidFill>
-                <a:latin typeface="Bahnschrift SemiBold"/>
-              </a:rPr>
-              <a:t>Молодёжь приходит, но не к КПРФ</a:t>
-            </a:r>
-            <a:endParaRPr sz="1250" b="0" i="0" cap="none">
-              <a:solidFill>
-                <a:srgbClr val="1B1A18"/>
-              </a:solidFill>
-              <a:latin typeface="Bahnschrift SemiBold"/>
-            </a:endParaRPr>
-          </a:p>
-        </p:txBody>
-      </p:sp>
-      <p:sp>
-        <p:nvSpPr>
-          <p:cNvPr id="695" name="TextBox 16"/>
-          <p:cNvSpPr txBox="1"/>
-          <p:nvPr/>
-        </p:nvSpPr>
-        <p:spPr>
-          <a:xfrm>
-            <a:off x="6096000" y="2768600"/>
-            <a:ext cx="5689600" cy="278130"/>
-          </a:xfrm>
-          <a:prstGeom prst="rect">
-            <a:avLst/>
-          </a:prstGeom>
-        </p:spPr>
-        <p:txBody>
-          <a:bodyPr wrap="square">
-            <a:spAutoFit/>
-          </a:bodyPr>
-          <a:lstStyle/>
-          <a:p>
-            <a:pPr algn="l">
-              <a:lnSpc>
-                <a:spcPct val="125000"/>
-              </a:lnSpc>
-              <a:spcAft>
-                <a:spcPts val="0"/>
-              </a:spcAft>
-            </a:pPr>
-            <a:r>
-              <a:rPr sz="980" b="0" i="0" cap="none">
-                <a:solidFill>
-                  <a:srgbClr val="55503F"/>
-                </a:solidFill>
-                <a:latin typeface="Georgia"/>
-              </a:rPr>
-              <a:t>В 2026-м молодых на участке было больше. Их голоса ушли к другим.</a:t>
-            </a:r>
-            <a:endParaRPr sz="980" b="0" i="0" cap="none">
-              <a:solidFill>
-                <a:srgbClr val="55503F"/>
-              </a:solidFill>
-              <a:latin typeface="Georgia"/>
-            </a:endParaRPr>
-          </a:p>
-        </p:txBody>
-      </p:sp>
-      <p:sp>
-        <p:nvSpPr>
-          <p:cNvPr id="696" name="Rectangle 17"/>
-          <p:cNvSpPr/>
-          <p:nvPr/>
-        </p:nvSpPr>
-        <p:spPr>
-          <a:xfrm>
-            <a:off x="812800" y="3454400"/>
-            <a:ext cx="10972800" cy="9525"/>
-          </a:xfrm>
-          <a:prstGeom prst="rect">
-            <a:avLst/>
-          </a:prstGeom>
-          <a:solidFill>
-            <a:srgbClr val="DED3B7"/>
-          </a:solidFill>
-          <a:ln>
-            <a:noFill/>
-          </a:ln>
-        </p:spPr>
-        <p:style>
-          <a:lnRef idx="2">
-            <a:schemeClr val="accent1">
-              <a:shade val="50000"/>
-            </a:schemeClr>
-          </a:lnRef>
-          <a:fillRef idx="1">
-            <a:schemeClr val="accent1"/>
-          </a:fillRef>
-          <a:effectRef idx="0">
-            <a:schemeClr val="accent1"/>
-          </a:effectRef>
-          <a:fontRef idx="minor">
-            <a:schemeClr val="lt1"/>
-          </a:fontRef>
-        </p:style>
-        <p:txBody>
-          <a:bodyPr anchor="ctr"/>
-          <a:lstStyle/>
-          <a:p/>
-        </p:txBody>
-      </p:sp>
-      <p:sp>
-        <p:nvSpPr>
-          <p:cNvPr id="697" name="TextBox 18"/>
-          <p:cNvSpPr txBox="1"/>
-          <p:nvPr/>
-        </p:nvSpPr>
-        <p:spPr>
-          <a:xfrm>
-            <a:off x="812800" y="3606800"/>
-            <a:ext cx="508000" cy="266700"/>
-          </a:xfrm>
-          <a:prstGeom prst="rect">
-            <a:avLst/>
-          </a:prstGeom>
-        </p:spPr>
-        <p:txBody>
-          <a:bodyPr wrap="square">
-            <a:spAutoFit/>
-          </a:bodyPr>
-          <a:lstStyle/>
-          <a:p>
-            <a:pPr algn="l">
-              <a:lnSpc>
-                <a:spcPct val="115000"/>
-              </a:lnSpc>
-              <a:spcAft>
-                <a:spcPts val="0"/>
-              </a:spcAft>
-            </a:pPr>
-            <a:r>
-              <a:rPr sz="1000" b="0" i="0" cap="none">
-                <a:solidFill>
-                  <a:srgbClr val="A82C1E"/>
-                </a:solidFill>
-                <a:latin typeface="Consolas"/>
-              </a:rPr>
-              <a:t>03</a:t>
-            </a:r>
-            <a:endParaRPr sz="1000" b="0" i="0" cap="none">
-              <a:solidFill>
-                <a:srgbClr val="A82C1E"/>
-              </a:solidFill>
-              <a:latin typeface="Consolas"/>
-            </a:endParaRPr>
-          </a:p>
-        </p:txBody>
-      </p:sp>
-      <p:sp>
-        <p:nvSpPr>
-          <p:cNvPr id="698" name="TextBox 19"/>
-          <p:cNvSpPr txBox="1"/>
-          <p:nvPr/>
-        </p:nvSpPr>
-        <p:spPr>
-          <a:xfrm>
-            <a:off x="1422400" y="3556000"/>
-            <a:ext cx="4572000" cy="310515"/>
-          </a:xfrm>
-          <a:prstGeom prst="rect">
-            <a:avLst/>
-          </a:prstGeom>
-        </p:spPr>
-        <p:txBody>
-          <a:bodyPr wrap="square">
-            <a:spAutoFit/>
-          </a:bodyPr>
-          <a:lstStyle/>
-          <a:p>
-            <a:pPr algn="l">
-              <a:lnSpc>
-                <a:spcPct val="115000"/>
-              </a:lnSpc>
-              <a:spcAft>
-                <a:spcPts val="0"/>
-              </a:spcAft>
-            </a:pPr>
-            <a:r>
-              <a:rPr sz="1250" b="0" i="0" cap="none">
-                <a:solidFill>
-                  <a:srgbClr val="1B1A18"/>
-                </a:solidFill>
-                <a:latin typeface="Bahnschrift SemiBold"/>
-              </a:rPr>
-              <a:t>Рост явки размывает долю</a:t>
-            </a:r>
-            <a:endParaRPr sz="1250" b="0" i="0" cap="none">
-              <a:solidFill>
-                <a:srgbClr val="1B1A18"/>
-              </a:solidFill>
-              <a:latin typeface="Bahnschrift SemiBold"/>
-            </a:endParaRPr>
-          </a:p>
-        </p:txBody>
-      </p:sp>
-      <p:sp>
-        <p:nvSpPr>
-          <p:cNvPr id="699" name="TextBox 20"/>
-          <p:cNvSpPr txBox="1"/>
-          <p:nvPr/>
-        </p:nvSpPr>
-        <p:spPr>
-          <a:xfrm>
-            <a:off x="6096000" y="3556000"/>
-            <a:ext cx="5689600" cy="278130"/>
-          </a:xfrm>
-          <a:prstGeom prst="rect">
-            <a:avLst/>
-          </a:prstGeom>
-        </p:spPr>
-        <p:txBody>
-          <a:bodyPr wrap="square">
-            <a:spAutoFit/>
-          </a:bodyPr>
-          <a:lstStyle/>
-          <a:p>
-            <a:pPr algn="l">
-              <a:lnSpc>
-                <a:spcPct val="125000"/>
-              </a:lnSpc>
-              <a:spcAft>
-                <a:spcPts val="0"/>
-              </a:spcAft>
-            </a:pPr>
-            <a:r>
-              <a:rPr sz="980" b="0" i="0" cap="none">
-                <a:solidFill>
-                  <a:srgbClr val="55503F"/>
-                </a:solidFill>
-                <a:latin typeface="Georgia"/>
-              </a:rPr>
-              <a:t>Голосов столько же, доля — вдвое меньше: новых избирателей мобилизовали не коммунисты.</a:t>
-            </a:r>
-            <a:endParaRPr sz="980" b="0" i="0" cap="none">
-              <a:solidFill>
-                <a:srgbClr val="55503F"/>
-              </a:solidFill>
-              <a:latin typeface="Georgia"/>
-            </a:endParaRPr>
-          </a:p>
-        </p:txBody>
-      </p:sp>
-      <p:sp>
-        <p:nvSpPr>
-          <p:cNvPr id="700" name="Rectangle 21"/>
-          <p:cNvSpPr/>
-          <p:nvPr/>
-        </p:nvSpPr>
-        <p:spPr>
-          <a:xfrm>
-            <a:off x="812800" y="4241800"/>
-            <a:ext cx="10972800" cy="9525"/>
-          </a:xfrm>
-          <a:prstGeom prst="rect">
-            <a:avLst/>
-          </a:prstGeom>
-          <a:solidFill>
-            <a:srgbClr val="DED3B7"/>
-          </a:solidFill>
-          <a:ln>
-            <a:noFill/>
-          </a:ln>
-        </p:spPr>
-        <p:style>
-          <a:lnRef idx="2">
-            <a:schemeClr val="accent1">
-              <a:shade val="50000"/>
-            </a:schemeClr>
-          </a:lnRef>
-          <a:fillRef idx="1">
-            <a:schemeClr val="accent1"/>
-          </a:fillRef>
-          <a:effectRef idx="0">
-            <a:schemeClr val="accent1"/>
-          </a:effectRef>
-          <a:fontRef idx="minor">
-            <a:schemeClr val="lt1"/>
-          </a:fontRef>
-        </p:style>
-        <p:txBody>
-          <a:bodyPr anchor="ctr"/>
-          <a:lstStyle/>
-          <a:p/>
-        </p:txBody>
-      </p:sp>
-      <p:sp>
-        <p:nvSpPr>
-          <p:cNvPr id="701" name="TextBox 22"/>
-          <p:cNvSpPr txBox="1"/>
-          <p:nvPr/>
-        </p:nvSpPr>
-        <p:spPr>
-          <a:xfrm>
-            <a:off x="812800" y="4394200"/>
-            <a:ext cx="508000" cy="266700"/>
-          </a:xfrm>
-          <a:prstGeom prst="rect">
-            <a:avLst/>
-          </a:prstGeom>
-        </p:spPr>
-        <p:txBody>
-          <a:bodyPr wrap="square">
-            <a:spAutoFit/>
-          </a:bodyPr>
-          <a:lstStyle/>
-          <a:p>
-            <a:pPr algn="l">
-              <a:lnSpc>
-                <a:spcPct val="115000"/>
-              </a:lnSpc>
-              <a:spcAft>
-                <a:spcPts val="0"/>
-              </a:spcAft>
-            </a:pPr>
-            <a:r>
-              <a:rPr sz="1000" b="0" i="0" cap="none">
-                <a:solidFill>
-                  <a:srgbClr val="A82C1E"/>
-                </a:solidFill>
-                <a:latin typeface="Consolas"/>
-              </a:rPr>
-              <a:t>04</a:t>
-            </a:r>
-            <a:endParaRPr sz="1000" b="0" i="0" cap="none">
-              <a:solidFill>
-                <a:srgbClr val="A82C1E"/>
-              </a:solidFill>
-              <a:latin typeface="Consolas"/>
-            </a:endParaRPr>
-          </a:p>
-        </p:txBody>
-      </p:sp>
-      <p:sp>
-        <p:nvSpPr>
-          <p:cNvPr id="702" name="TextBox 23"/>
-          <p:cNvSpPr txBox="1"/>
-          <p:nvPr/>
-        </p:nvSpPr>
-        <p:spPr>
-          <a:xfrm>
-            <a:off x="1422400" y="4343400"/>
-            <a:ext cx="4572000" cy="310515"/>
-          </a:xfrm>
-          <a:prstGeom prst="rect">
-            <a:avLst/>
-          </a:prstGeom>
-        </p:spPr>
-        <p:txBody>
-          <a:bodyPr wrap="square">
-            <a:spAutoFit/>
-          </a:bodyPr>
-          <a:lstStyle/>
-          <a:p>
-            <a:pPr algn="l">
-              <a:lnSpc>
-                <a:spcPct val="115000"/>
-              </a:lnSpc>
-              <a:spcAft>
-                <a:spcPts val="0"/>
-              </a:spcAft>
-            </a:pPr>
-            <a:r>
-              <a:rPr sz="1250" b="0" i="0" cap="none">
-                <a:solidFill>
-                  <a:srgbClr val="1B1A18"/>
-                </a:solidFill>
-                <a:latin typeface="Bahnschrift SemiBold"/>
-              </a:rPr>
-              <a:t>Личный депутат сильнее бренда</a:t>
-            </a:r>
-            <a:endParaRPr sz="1250" b="0" i="0" cap="none">
-              <a:solidFill>
-                <a:srgbClr val="1B1A18"/>
-              </a:solidFill>
-              <a:latin typeface="Bahnschrift SemiBold"/>
-            </a:endParaRPr>
-          </a:p>
-        </p:txBody>
-      </p:sp>
-      <p:sp>
-        <p:nvSpPr>
-          <p:cNvPr id="703" name="TextBox 24"/>
-          <p:cNvSpPr txBox="1"/>
-          <p:nvPr/>
-        </p:nvSpPr>
-        <p:spPr>
-          <a:xfrm>
-            <a:off x="6096000" y="4343400"/>
-            <a:ext cx="5689600" cy="278130"/>
-          </a:xfrm>
-          <a:prstGeom prst="rect">
-            <a:avLst/>
-          </a:prstGeom>
-        </p:spPr>
-        <p:txBody>
-          <a:bodyPr wrap="square">
-            <a:spAutoFit/>
-          </a:bodyPr>
-          <a:lstStyle/>
-          <a:p>
-            <a:pPr algn="l">
-              <a:lnSpc>
-                <a:spcPct val="125000"/>
-              </a:lnSpc>
-              <a:spcAft>
-                <a:spcPts val="0"/>
-              </a:spcAft>
-            </a:pPr>
-            <a:r>
-              <a:rPr sz="980" b="0" i="0" cap="none">
-                <a:solidFill>
-                  <a:srgbClr val="55503F"/>
-                </a:solidFill>
-                <a:latin typeface="Georgia"/>
-              </a:rPr>
-              <a:t>Там, где есть узнаваемый человек, результат выше партийного среднего.</a:t>
-            </a:r>
-            <a:endParaRPr sz="980" b="0" i="0" cap="none">
-              <a:solidFill>
-                <a:srgbClr val="55503F"/>
-              </a:solidFill>
-              <a:latin typeface="Georgia"/>
-            </a:endParaRPr>
-          </a:p>
-        </p:txBody>
-      </p:sp>
-      <p:sp>
-        <p:nvSpPr>
-          <p:cNvPr id="704" name="Rectangle 25"/>
-          <p:cNvSpPr/>
-          <p:nvPr/>
-        </p:nvSpPr>
-        <p:spPr>
-          <a:xfrm>
-            <a:off x="812800" y="5029200"/>
-            <a:ext cx="10972800" cy="9525"/>
-          </a:xfrm>
-          <a:prstGeom prst="rect">
-            <a:avLst/>
-          </a:prstGeom>
-          <a:solidFill>
-            <a:srgbClr val="DED3B7"/>
-          </a:solidFill>
-          <a:ln>
-            <a:noFill/>
-          </a:ln>
-        </p:spPr>
-        <p:style>
-          <a:lnRef idx="2">
-            <a:schemeClr val="accent1">
-              <a:shade val="50000"/>
-            </a:schemeClr>
-          </a:lnRef>
-          <a:fillRef idx="1">
-            <a:schemeClr val="accent1"/>
-          </a:fillRef>
-          <a:effectRef idx="0">
-            <a:schemeClr val="accent1"/>
-          </a:effectRef>
-          <a:fontRef idx="minor">
-            <a:schemeClr val="lt1"/>
-          </a:fontRef>
-        </p:style>
-        <p:txBody>
-          <a:bodyPr anchor="ctr"/>
-          <a:lstStyle/>
-          <a:p/>
-        </p:txBody>
-      </p:sp>
-      <p:sp>
-        <p:nvSpPr>
-          <p:cNvPr id="705" name="TextBox 26"/>
-          <p:cNvSpPr txBox="1"/>
-          <p:nvPr/>
-        </p:nvSpPr>
-        <p:spPr>
-          <a:xfrm>
-            <a:off x="812800" y="5181600"/>
-            <a:ext cx="508000" cy="266700"/>
-          </a:xfrm>
-          <a:prstGeom prst="rect">
-            <a:avLst/>
-          </a:prstGeom>
-        </p:spPr>
-        <p:txBody>
-          <a:bodyPr wrap="square">
-            <a:spAutoFit/>
-          </a:bodyPr>
-          <a:lstStyle/>
-          <a:p>
-            <a:pPr algn="l">
-              <a:lnSpc>
-                <a:spcPct val="115000"/>
-              </a:lnSpc>
-              <a:spcAft>
-                <a:spcPts val="0"/>
-              </a:spcAft>
-            </a:pPr>
-            <a:r>
-              <a:rPr sz="1000" b="0" i="0" cap="none">
-                <a:solidFill>
-                  <a:srgbClr val="A82C1E"/>
-                </a:solidFill>
-                <a:latin typeface="Consolas"/>
-              </a:rPr>
-              <a:t>05</a:t>
-            </a:r>
-            <a:endParaRPr sz="1000" b="0" i="0" cap="none">
-              <a:solidFill>
-                <a:srgbClr val="A82C1E"/>
-              </a:solidFill>
-              <a:latin typeface="Consolas"/>
-            </a:endParaRPr>
-          </a:p>
-        </p:txBody>
-      </p:sp>
-      <p:sp>
-        <p:nvSpPr>
-          <p:cNvPr id="706" name="TextBox 27"/>
-          <p:cNvSpPr txBox="1"/>
-          <p:nvPr/>
-        </p:nvSpPr>
-        <p:spPr>
-          <a:xfrm>
-            <a:off x="1422400" y="5130800"/>
-            <a:ext cx="4572000" cy="310515"/>
-          </a:xfrm>
-          <a:prstGeom prst="rect">
-            <a:avLst/>
-          </a:prstGeom>
-        </p:spPr>
-        <p:txBody>
-          <a:bodyPr wrap="square">
-            <a:spAutoFit/>
-          </a:bodyPr>
-          <a:lstStyle/>
-          <a:p>
-            <a:pPr algn="l">
-              <a:lnSpc>
-                <a:spcPct val="115000"/>
-              </a:lnSpc>
-              <a:spcAft>
-                <a:spcPts val="0"/>
-              </a:spcAft>
-            </a:pPr>
-            <a:r>
-              <a:rPr sz="1250" b="0" i="0" cap="none">
-                <a:solidFill>
-                  <a:srgbClr val="1B1A18"/>
-                </a:solidFill>
-                <a:latin typeface="Bahnschrift SemiBold"/>
-              </a:rPr>
-              <a:t>Агитация не доходит до окраинной молодёжи</a:t>
-            </a:r>
-            <a:endParaRPr sz="1250" b="0" i="0" cap="none">
-              <a:solidFill>
-                <a:srgbClr val="1B1A18"/>
-              </a:solidFill>
-              <a:latin typeface="Bahnschrift SemiBold"/>
-            </a:endParaRPr>
-          </a:p>
-        </p:txBody>
-      </p:sp>
-      <p:sp>
-        <p:nvSpPr>
-          <p:cNvPr id="707" name="TextBox 28"/>
-          <p:cNvSpPr txBox="1"/>
-          <p:nvPr/>
-        </p:nvSpPr>
-        <p:spPr>
-          <a:xfrm>
-            <a:off x="6096000" y="5130800"/>
-            <a:ext cx="5689600" cy="278130"/>
-          </a:xfrm>
-          <a:prstGeom prst="rect">
-            <a:avLst/>
-          </a:prstGeom>
-        </p:spPr>
-        <p:txBody>
-          <a:bodyPr wrap="square">
-            <a:spAutoFit/>
-          </a:bodyPr>
-          <a:lstStyle/>
-          <a:p>
-            <a:pPr algn="l">
-              <a:lnSpc>
-                <a:spcPct val="125000"/>
-              </a:lnSpc>
-              <a:spcAft>
-                <a:spcPts val="0"/>
-              </a:spcAft>
-            </a:pPr>
-            <a:r>
-              <a:rPr sz="980" b="0" i="0" cap="none">
-                <a:solidFill>
-                  <a:srgbClr val="55503F"/>
-                </a:solidFill>
-                <a:latin typeface="Georgia"/>
-              </a:rPr>
-              <a:t>Газета и приёмная работают на ядро; районных ячеек и цифры почти нет.</a:t>
-            </a:r>
-            <a:endParaRPr sz="980" b="0" i="0" cap="none">
+              <a:t>Ограничение: «рабочая молодёжь» — не одна группа. Данных по профессиям в открытом доступе мало, поэтому гипотеза проверяется косвенно — через возраст и район.</a:t>
+            </a:r>
+            <a:endParaRPr sz="920" b="0" i="1" cap="none">
               <a:solidFill>
                 <a:srgbClr val="55503F"/>
               </a:solidFill>
@@ -14393,7 +14396,7 @@
       </p:grpSpPr>
       <p:sp>
         <p:nvSpPr>
-          <p:cNvPr id="708" name="Rectangle 1"/>
+          <p:cNvPr id="680" name="Rectangle 1"/>
           <p:cNvSpPr/>
           <p:nvPr/>
         </p:nvSpPr>
@@ -14436,7 +14439,7 @@
       </p:sp>
       <p:sp>
         <p:nvSpPr>
-          <p:cNvPr id="709" name="TextBox 2"/>
+          <p:cNvPr id="681" name="TextBox 2"/>
           <p:cNvSpPr txBox="1"/>
           <p:nvPr/>
         </p:nvSpPr>
@@ -14470,14 +14473,14 @@
                 </a:solidFill>
                 <a:latin typeface="Consolas"/>
               </a:rPr>
-              <a:t>16 / СЦЕНАРИИ</a:t>
-            </a:r>
-          </a:p>
-        </p:txBody>
-      </p:sp>
-      <p:sp>
-        <p:nvSpPr>
-          <p:cNvPr id="710" name="TextBox 3"/>
+              <a:t>16 / ИТОГИ</a:t>
+            </a:r>
+          </a:p>
+        </p:txBody>
+      </p:sp>
+      <p:sp>
+        <p:nvSpPr>
+          <p:cNvPr id="682" name="TextBox 3"/>
           <p:cNvSpPr txBox="1"/>
           <p:nvPr/>
         </p:nvSpPr>
@@ -14524,7 +14527,7 @@
       </p:sp>
       <p:sp>
         <p:nvSpPr>
-          <p:cNvPr id="711" name="TextBox 4"/>
+          <p:cNvPr id="683" name="TextBox 4"/>
           <p:cNvSpPr txBox="1"/>
           <p:nvPr/>
         </p:nvSpPr>
@@ -14558,7 +14561,7 @@
                 </a:solidFill>
                 <a:latin typeface="Bahnschrift SemiBold"/>
               </a:rPr>
-              <a:t>Что будет дальше: три траектории</a:t>
+              <a:t>Что видно из комиссии</a:t>
             </a:r>
             <a:endParaRPr sz="3100" b="0" i="0" cap="none">
               <a:solidFill>
@@ -14571,7 +14574,7 @@
       </p:sp>
       <p:sp>
         <p:nvSpPr>
-          <p:cNvPr id="712" name="Rectangle 5"/>
+          <p:cNvPr id="684" name="Rectangle 5"/>
           <p:cNvSpPr/>
           <p:nvPr/>
         </p:nvSpPr>
@@ -14614,7 +14617,7 @@
       </p:sp>
       <p:sp>
         <p:nvSpPr>
-          <p:cNvPr id="713" name="Rectangle 6"/>
+          <p:cNvPr id="685" name="Rectangle 6"/>
           <p:cNvSpPr/>
           <p:nvPr/>
         </p:nvSpPr>
@@ -14657,7 +14660,7 @@
       </p:sp>
       <p:sp>
         <p:nvSpPr>
-          <p:cNvPr id="715" name="TextBox 8"/>
+          <p:cNvPr id="687" name="TextBox 8"/>
           <p:cNvSpPr txBox="1"/>
           <p:nvPr/>
         </p:nvSpPr>
@@ -14691,7 +14694,1265 @@
                 </a:solidFill>
                 <a:latin typeface="Consolas"/>
               </a:rPr>
-              <a:t>17 / 17</a:t>
+              <a:t>17 / 18</a:t>
+            </a:r>
+          </a:p>
+        </p:txBody>
+      </p:sp>
+      <p:sp>
+        <p:nvSpPr>
+          <p:cNvPr id="688" name="Rectangle 9"/>
+          <p:cNvSpPr/>
+          <p:nvPr/>
+        </p:nvSpPr>
+        <p:spPr>
+          <a:xfrm>
+            <a:off x="812800" y="1879600"/>
+            <a:ext cx="10972800" cy="9525"/>
+          </a:xfrm>
+          <a:prstGeom prst="rect">
+            <a:avLst/>
+          </a:prstGeom>
+          <a:solidFill>
+            <a:srgbClr val="DED3B7"/>
+          </a:solidFill>
+          <a:ln>
+            <a:noFill/>
+          </a:ln>
+        </p:spPr>
+        <p:style>
+          <a:lnRef idx="2">
+            <a:schemeClr val="accent1">
+              <a:shade val="50000"/>
+            </a:schemeClr>
+          </a:lnRef>
+          <a:fillRef idx="1">
+            <a:schemeClr val="accent1"/>
+          </a:fillRef>
+          <a:effectRef idx="0">
+            <a:schemeClr val="accent1"/>
+          </a:effectRef>
+          <a:fontRef idx="minor">
+            <a:schemeClr val="lt1"/>
+          </a:fontRef>
+        </p:style>
+        <p:txBody>
+          <a:bodyPr anchor="ctr"/>
+          <a:lstStyle/>
+          <a:p/>
+        </p:txBody>
+      </p:sp>
+      <p:sp>
+        <p:nvSpPr>
+          <p:cNvPr id="689" name="TextBox 10"/>
+          <p:cNvSpPr txBox="1"/>
+          <p:nvPr/>
+        </p:nvSpPr>
+        <p:spPr>
+          <a:xfrm>
+            <a:off x="812800" y="2032000"/>
+            <a:ext cx="508000" cy="266700"/>
+          </a:xfrm>
+          <a:prstGeom prst="rect">
+            <a:avLst/>
+          </a:prstGeom>
+        </p:spPr>
+        <p:txBody>
+          <a:bodyPr wrap="square">
+            <a:spAutoFit/>
+          </a:bodyPr>
+          <a:lstStyle/>
+          <a:p>
+            <a:pPr algn="l">
+              <a:lnSpc>
+                <a:spcPct val="115000"/>
+              </a:lnSpc>
+              <a:spcAft>
+                <a:spcPts val="0"/>
+              </a:spcAft>
+            </a:pPr>
+            <a:r>
+              <a:rPr sz="1000" b="0" i="0" cap="none">
+                <a:solidFill>
+                  <a:srgbClr val="A82C1E"/>
+                </a:solidFill>
+                <a:latin typeface="Consolas"/>
+              </a:rPr>
+              <a:t>01</a:t>
+            </a:r>
+            <a:endParaRPr sz="1000" b="0" i="0" cap="none">
+              <a:solidFill>
+                <a:srgbClr val="A82C1E"/>
+              </a:solidFill>
+              <a:latin typeface="Consolas"/>
+            </a:endParaRPr>
+          </a:p>
+        </p:txBody>
+      </p:sp>
+      <p:sp>
+        <p:nvSpPr>
+          <p:cNvPr id="690" name="TextBox 11"/>
+          <p:cNvSpPr txBox="1"/>
+          <p:nvPr/>
+        </p:nvSpPr>
+        <p:spPr>
+          <a:xfrm>
+            <a:off x="1422400" y="1981200"/>
+            <a:ext cx="4572000" cy="310515"/>
+          </a:xfrm>
+          <a:prstGeom prst="rect">
+            <a:avLst/>
+          </a:prstGeom>
+        </p:spPr>
+        <p:txBody>
+          <a:bodyPr wrap="square">
+            <a:spAutoFit/>
+          </a:bodyPr>
+          <a:lstStyle/>
+          <a:p>
+            <a:pPr algn="l">
+              <a:lnSpc>
+                <a:spcPct val="115000"/>
+              </a:lnSpc>
+              <a:spcAft>
+                <a:spcPts val="0"/>
+              </a:spcAft>
+            </a:pPr>
+            <a:r>
+              <a:rPr sz="1250" b="0" i="0" cap="none">
+                <a:solidFill>
+                  <a:srgbClr val="1B1A18"/>
+                </a:solidFill>
+                <a:latin typeface="Bahnschrift SemiBold"/>
+              </a:rPr>
+              <a:t>Ядро приходит стабильно — и стареет</a:t>
+            </a:r>
+            <a:endParaRPr sz="1250" b="0" i="0" cap="none">
+              <a:solidFill>
+                <a:srgbClr val="1B1A18"/>
+              </a:solidFill>
+              <a:latin typeface="Bahnschrift SemiBold"/>
+            </a:endParaRPr>
+          </a:p>
+        </p:txBody>
+      </p:sp>
+      <p:sp>
+        <p:nvSpPr>
+          <p:cNvPr id="691" name="TextBox 12"/>
+          <p:cNvSpPr txBox="1"/>
+          <p:nvPr/>
+        </p:nvSpPr>
+        <p:spPr>
+          <a:xfrm>
+            <a:off x="6096000" y="1981200"/>
+            <a:ext cx="5689600" cy="278130"/>
+          </a:xfrm>
+          <a:prstGeom prst="rect">
+            <a:avLst/>
+          </a:prstGeom>
+        </p:spPr>
+        <p:txBody>
+          <a:bodyPr wrap="square">
+            <a:spAutoFit/>
+          </a:bodyPr>
+          <a:lstStyle/>
+          <a:p>
+            <a:pPr algn="l">
+              <a:lnSpc>
+                <a:spcPct val="125000"/>
+              </a:lnSpc>
+              <a:spcAft>
+                <a:spcPts val="0"/>
+              </a:spcAft>
+            </a:pPr>
+            <a:r>
+              <a:rPr sz="980" b="0" i="0" cap="none">
+                <a:solidFill>
+                  <a:srgbClr val="55503F"/>
+                </a:solidFill>
+                <a:latin typeface="Georgia"/>
+              </a:rPr>
+              <a:t>Одни и те же лица каждые выборы: 70% сторонников КПРФ — старше 55 лет.</a:t>
+            </a:r>
+            <a:endParaRPr sz="980" b="0" i="0" cap="none">
+              <a:solidFill>
+                <a:srgbClr val="55503F"/>
+              </a:solidFill>
+              <a:latin typeface="Georgia"/>
+            </a:endParaRPr>
+          </a:p>
+        </p:txBody>
+      </p:sp>
+      <p:sp>
+        <p:nvSpPr>
+          <p:cNvPr id="692" name="Rectangle 13"/>
+          <p:cNvSpPr/>
+          <p:nvPr/>
+        </p:nvSpPr>
+        <p:spPr>
+          <a:xfrm>
+            <a:off x="812800" y="2667000"/>
+            <a:ext cx="10972800" cy="9525"/>
+          </a:xfrm>
+          <a:prstGeom prst="rect">
+            <a:avLst/>
+          </a:prstGeom>
+          <a:solidFill>
+            <a:srgbClr val="DED3B7"/>
+          </a:solidFill>
+          <a:ln>
+            <a:noFill/>
+          </a:ln>
+        </p:spPr>
+        <p:style>
+          <a:lnRef idx="2">
+            <a:schemeClr val="accent1">
+              <a:shade val="50000"/>
+            </a:schemeClr>
+          </a:lnRef>
+          <a:fillRef idx="1">
+            <a:schemeClr val="accent1"/>
+          </a:fillRef>
+          <a:effectRef idx="0">
+            <a:schemeClr val="accent1"/>
+          </a:effectRef>
+          <a:fontRef idx="minor">
+            <a:schemeClr val="lt1"/>
+          </a:fontRef>
+        </p:style>
+        <p:txBody>
+          <a:bodyPr anchor="ctr"/>
+          <a:lstStyle/>
+          <a:p/>
+        </p:txBody>
+      </p:sp>
+      <p:sp>
+        <p:nvSpPr>
+          <p:cNvPr id="693" name="TextBox 14"/>
+          <p:cNvSpPr txBox="1"/>
+          <p:nvPr/>
+        </p:nvSpPr>
+        <p:spPr>
+          <a:xfrm>
+            <a:off x="812800" y="2819400"/>
+            <a:ext cx="508000" cy="266700"/>
+          </a:xfrm>
+          <a:prstGeom prst="rect">
+            <a:avLst/>
+          </a:prstGeom>
+        </p:spPr>
+        <p:txBody>
+          <a:bodyPr wrap="square">
+            <a:spAutoFit/>
+          </a:bodyPr>
+          <a:lstStyle/>
+          <a:p>
+            <a:pPr algn="l">
+              <a:lnSpc>
+                <a:spcPct val="115000"/>
+              </a:lnSpc>
+              <a:spcAft>
+                <a:spcPts val="0"/>
+              </a:spcAft>
+            </a:pPr>
+            <a:r>
+              <a:rPr sz="1000" b="0" i="0" cap="none">
+                <a:solidFill>
+                  <a:srgbClr val="A82C1E"/>
+                </a:solidFill>
+                <a:latin typeface="Consolas"/>
+              </a:rPr>
+              <a:t>02</a:t>
+            </a:r>
+            <a:endParaRPr sz="1000" b="0" i="0" cap="none">
+              <a:solidFill>
+                <a:srgbClr val="A82C1E"/>
+              </a:solidFill>
+              <a:latin typeface="Consolas"/>
+            </a:endParaRPr>
+          </a:p>
+        </p:txBody>
+      </p:sp>
+      <p:sp>
+        <p:nvSpPr>
+          <p:cNvPr id="694" name="TextBox 15"/>
+          <p:cNvSpPr txBox="1"/>
+          <p:nvPr/>
+        </p:nvSpPr>
+        <p:spPr>
+          <a:xfrm>
+            <a:off x="1422400" y="2768600"/>
+            <a:ext cx="4572000" cy="310515"/>
+          </a:xfrm>
+          <a:prstGeom prst="rect">
+            <a:avLst/>
+          </a:prstGeom>
+        </p:spPr>
+        <p:txBody>
+          <a:bodyPr wrap="square">
+            <a:spAutoFit/>
+          </a:bodyPr>
+          <a:lstStyle/>
+          <a:p>
+            <a:pPr algn="l">
+              <a:lnSpc>
+                <a:spcPct val="115000"/>
+              </a:lnSpc>
+              <a:spcAft>
+                <a:spcPts val="0"/>
+              </a:spcAft>
+            </a:pPr>
+            <a:r>
+              <a:rPr sz="1250" b="0" i="0" cap="none">
+                <a:solidFill>
+                  <a:srgbClr val="1B1A18"/>
+                </a:solidFill>
+                <a:latin typeface="Bahnschrift SemiBold"/>
+              </a:rPr>
+              <a:t>Молодёжь приходит, но не к КПРФ</a:t>
+            </a:r>
+            <a:endParaRPr sz="1250" b="0" i="0" cap="none">
+              <a:solidFill>
+                <a:srgbClr val="1B1A18"/>
+              </a:solidFill>
+              <a:latin typeface="Bahnschrift SemiBold"/>
+            </a:endParaRPr>
+          </a:p>
+        </p:txBody>
+      </p:sp>
+      <p:sp>
+        <p:nvSpPr>
+          <p:cNvPr id="695" name="TextBox 16"/>
+          <p:cNvSpPr txBox="1"/>
+          <p:nvPr/>
+        </p:nvSpPr>
+        <p:spPr>
+          <a:xfrm>
+            <a:off x="6096000" y="2768600"/>
+            <a:ext cx="5689600" cy="278130"/>
+          </a:xfrm>
+          <a:prstGeom prst="rect">
+            <a:avLst/>
+          </a:prstGeom>
+        </p:spPr>
+        <p:txBody>
+          <a:bodyPr wrap="square">
+            <a:spAutoFit/>
+          </a:bodyPr>
+          <a:lstStyle/>
+          <a:p>
+            <a:pPr algn="l">
+              <a:lnSpc>
+                <a:spcPct val="125000"/>
+              </a:lnSpc>
+              <a:spcAft>
+                <a:spcPts val="0"/>
+              </a:spcAft>
+            </a:pPr>
+            <a:r>
+              <a:rPr sz="980" b="0" i="0" cap="none">
+                <a:solidFill>
+                  <a:srgbClr val="55503F"/>
+                </a:solidFill>
+                <a:latin typeface="Georgia"/>
+              </a:rPr>
+              <a:t>В 2026-м молодых на участке было больше. Их голоса ушли к другим.</a:t>
+            </a:r>
+            <a:endParaRPr sz="980" b="0" i="0" cap="none">
+              <a:solidFill>
+                <a:srgbClr val="55503F"/>
+              </a:solidFill>
+              <a:latin typeface="Georgia"/>
+            </a:endParaRPr>
+          </a:p>
+        </p:txBody>
+      </p:sp>
+      <p:sp>
+        <p:nvSpPr>
+          <p:cNvPr id="696" name="Rectangle 17"/>
+          <p:cNvSpPr/>
+          <p:nvPr/>
+        </p:nvSpPr>
+        <p:spPr>
+          <a:xfrm>
+            <a:off x="812800" y="3454400"/>
+            <a:ext cx="10972800" cy="9525"/>
+          </a:xfrm>
+          <a:prstGeom prst="rect">
+            <a:avLst/>
+          </a:prstGeom>
+          <a:solidFill>
+            <a:srgbClr val="DED3B7"/>
+          </a:solidFill>
+          <a:ln>
+            <a:noFill/>
+          </a:ln>
+        </p:spPr>
+        <p:style>
+          <a:lnRef idx="2">
+            <a:schemeClr val="accent1">
+              <a:shade val="50000"/>
+            </a:schemeClr>
+          </a:lnRef>
+          <a:fillRef idx="1">
+            <a:schemeClr val="accent1"/>
+          </a:fillRef>
+          <a:effectRef idx="0">
+            <a:schemeClr val="accent1"/>
+          </a:effectRef>
+          <a:fontRef idx="minor">
+            <a:schemeClr val="lt1"/>
+          </a:fontRef>
+        </p:style>
+        <p:txBody>
+          <a:bodyPr anchor="ctr"/>
+          <a:lstStyle/>
+          <a:p/>
+        </p:txBody>
+      </p:sp>
+      <p:sp>
+        <p:nvSpPr>
+          <p:cNvPr id="697" name="TextBox 18"/>
+          <p:cNvSpPr txBox="1"/>
+          <p:nvPr/>
+        </p:nvSpPr>
+        <p:spPr>
+          <a:xfrm>
+            <a:off x="812800" y="3606800"/>
+            <a:ext cx="508000" cy="266700"/>
+          </a:xfrm>
+          <a:prstGeom prst="rect">
+            <a:avLst/>
+          </a:prstGeom>
+        </p:spPr>
+        <p:txBody>
+          <a:bodyPr wrap="square">
+            <a:spAutoFit/>
+          </a:bodyPr>
+          <a:lstStyle/>
+          <a:p>
+            <a:pPr algn="l">
+              <a:lnSpc>
+                <a:spcPct val="115000"/>
+              </a:lnSpc>
+              <a:spcAft>
+                <a:spcPts val="0"/>
+              </a:spcAft>
+            </a:pPr>
+            <a:r>
+              <a:rPr sz="1000" b="0" i="0" cap="none">
+                <a:solidFill>
+                  <a:srgbClr val="A82C1E"/>
+                </a:solidFill>
+                <a:latin typeface="Consolas"/>
+              </a:rPr>
+              <a:t>03</a:t>
+            </a:r>
+            <a:endParaRPr sz="1000" b="0" i="0" cap="none">
+              <a:solidFill>
+                <a:srgbClr val="A82C1E"/>
+              </a:solidFill>
+              <a:latin typeface="Consolas"/>
+            </a:endParaRPr>
+          </a:p>
+        </p:txBody>
+      </p:sp>
+      <p:sp>
+        <p:nvSpPr>
+          <p:cNvPr id="698" name="TextBox 19"/>
+          <p:cNvSpPr txBox="1"/>
+          <p:nvPr/>
+        </p:nvSpPr>
+        <p:spPr>
+          <a:xfrm>
+            <a:off x="1422400" y="3556000"/>
+            <a:ext cx="4572000" cy="310515"/>
+          </a:xfrm>
+          <a:prstGeom prst="rect">
+            <a:avLst/>
+          </a:prstGeom>
+        </p:spPr>
+        <p:txBody>
+          <a:bodyPr wrap="square">
+            <a:spAutoFit/>
+          </a:bodyPr>
+          <a:lstStyle/>
+          <a:p>
+            <a:pPr algn="l">
+              <a:lnSpc>
+                <a:spcPct val="115000"/>
+              </a:lnSpc>
+              <a:spcAft>
+                <a:spcPts val="0"/>
+              </a:spcAft>
+            </a:pPr>
+            <a:r>
+              <a:rPr sz="1250" b="0" i="0" cap="none">
+                <a:solidFill>
+                  <a:srgbClr val="1B1A18"/>
+                </a:solidFill>
+                <a:latin typeface="Bahnschrift SemiBold"/>
+              </a:rPr>
+              <a:t>Рост явки размывает долю</a:t>
+            </a:r>
+            <a:endParaRPr sz="1250" b="0" i="0" cap="none">
+              <a:solidFill>
+                <a:srgbClr val="1B1A18"/>
+              </a:solidFill>
+              <a:latin typeface="Bahnschrift SemiBold"/>
+            </a:endParaRPr>
+          </a:p>
+        </p:txBody>
+      </p:sp>
+      <p:sp>
+        <p:nvSpPr>
+          <p:cNvPr id="699" name="TextBox 20"/>
+          <p:cNvSpPr txBox="1"/>
+          <p:nvPr/>
+        </p:nvSpPr>
+        <p:spPr>
+          <a:xfrm>
+            <a:off x="6096000" y="3556000"/>
+            <a:ext cx="5689600" cy="278130"/>
+          </a:xfrm>
+          <a:prstGeom prst="rect">
+            <a:avLst/>
+          </a:prstGeom>
+        </p:spPr>
+        <p:txBody>
+          <a:bodyPr wrap="square">
+            <a:spAutoFit/>
+          </a:bodyPr>
+          <a:lstStyle/>
+          <a:p>
+            <a:pPr algn="l">
+              <a:lnSpc>
+                <a:spcPct val="125000"/>
+              </a:lnSpc>
+              <a:spcAft>
+                <a:spcPts val="0"/>
+              </a:spcAft>
+            </a:pPr>
+            <a:r>
+              <a:rPr sz="980" b="0" i="0" cap="none">
+                <a:solidFill>
+                  <a:srgbClr val="55503F"/>
+                </a:solidFill>
+                <a:latin typeface="Georgia"/>
+              </a:rPr>
+              <a:t>Голосов столько же, доля — вдвое меньше: новых избирателей мобилизовали не коммунисты.</a:t>
+            </a:r>
+            <a:endParaRPr sz="980" b="0" i="0" cap="none">
+              <a:solidFill>
+                <a:srgbClr val="55503F"/>
+              </a:solidFill>
+              <a:latin typeface="Georgia"/>
+            </a:endParaRPr>
+          </a:p>
+        </p:txBody>
+      </p:sp>
+      <p:sp>
+        <p:nvSpPr>
+          <p:cNvPr id="700" name="Rectangle 21"/>
+          <p:cNvSpPr/>
+          <p:nvPr/>
+        </p:nvSpPr>
+        <p:spPr>
+          <a:xfrm>
+            <a:off x="812800" y="4241800"/>
+            <a:ext cx="10972800" cy="9525"/>
+          </a:xfrm>
+          <a:prstGeom prst="rect">
+            <a:avLst/>
+          </a:prstGeom>
+          <a:solidFill>
+            <a:srgbClr val="DED3B7"/>
+          </a:solidFill>
+          <a:ln>
+            <a:noFill/>
+          </a:ln>
+        </p:spPr>
+        <p:style>
+          <a:lnRef idx="2">
+            <a:schemeClr val="accent1">
+              <a:shade val="50000"/>
+            </a:schemeClr>
+          </a:lnRef>
+          <a:fillRef idx="1">
+            <a:schemeClr val="accent1"/>
+          </a:fillRef>
+          <a:effectRef idx="0">
+            <a:schemeClr val="accent1"/>
+          </a:effectRef>
+          <a:fontRef idx="minor">
+            <a:schemeClr val="lt1"/>
+          </a:fontRef>
+        </p:style>
+        <p:txBody>
+          <a:bodyPr anchor="ctr"/>
+          <a:lstStyle/>
+          <a:p/>
+        </p:txBody>
+      </p:sp>
+      <p:sp>
+        <p:nvSpPr>
+          <p:cNvPr id="701" name="TextBox 22"/>
+          <p:cNvSpPr txBox="1"/>
+          <p:nvPr/>
+        </p:nvSpPr>
+        <p:spPr>
+          <a:xfrm>
+            <a:off x="812800" y="4394200"/>
+            <a:ext cx="508000" cy="266700"/>
+          </a:xfrm>
+          <a:prstGeom prst="rect">
+            <a:avLst/>
+          </a:prstGeom>
+        </p:spPr>
+        <p:txBody>
+          <a:bodyPr wrap="square">
+            <a:spAutoFit/>
+          </a:bodyPr>
+          <a:lstStyle/>
+          <a:p>
+            <a:pPr algn="l">
+              <a:lnSpc>
+                <a:spcPct val="115000"/>
+              </a:lnSpc>
+              <a:spcAft>
+                <a:spcPts val="0"/>
+              </a:spcAft>
+            </a:pPr>
+            <a:r>
+              <a:rPr sz="1000" b="0" i="0" cap="none">
+                <a:solidFill>
+                  <a:srgbClr val="A82C1E"/>
+                </a:solidFill>
+                <a:latin typeface="Consolas"/>
+              </a:rPr>
+              <a:t>04</a:t>
+            </a:r>
+            <a:endParaRPr sz="1000" b="0" i="0" cap="none">
+              <a:solidFill>
+                <a:srgbClr val="A82C1E"/>
+              </a:solidFill>
+              <a:latin typeface="Consolas"/>
+            </a:endParaRPr>
+          </a:p>
+        </p:txBody>
+      </p:sp>
+      <p:sp>
+        <p:nvSpPr>
+          <p:cNvPr id="702" name="TextBox 23"/>
+          <p:cNvSpPr txBox="1"/>
+          <p:nvPr/>
+        </p:nvSpPr>
+        <p:spPr>
+          <a:xfrm>
+            <a:off x="1422400" y="4343400"/>
+            <a:ext cx="4572000" cy="310515"/>
+          </a:xfrm>
+          <a:prstGeom prst="rect">
+            <a:avLst/>
+          </a:prstGeom>
+        </p:spPr>
+        <p:txBody>
+          <a:bodyPr wrap="square">
+            <a:spAutoFit/>
+          </a:bodyPr>
+          <a:lstStyle/>
+          <a:p>
+            <a:pPr algn="l">
+              <a:lnSpc>
+                <a:spcPct val="115000"/>
+              </a:lnSpc>
+              <a:spcAft>
+                <a:spcPts val="0"/>
+              </a:spcAft>
+            </a:pPr>
+            <a:r>
+              <a:rPr sz="1250" b="0" i="0" cap="none">
+                <a:solidFill>
+                  <a:srgbClr val="1B1A18"/>
+                </a:solidFill>
+                <a:latin typeface="Bahnschrift SemiBold"/>
+              </a:rPr>
+              <a:t>Личный депутат сильнее бренда</a:t>
+            </a:r>
+            <a:endParaRPr sz="1250" b="0" i="0" cap="none">
+              <a:solidFill>
+                <a:srgbClr val="1B1A18"/>
+              </a:solidFill>
+              <a:latin typeface="Bahnschrift SemiBold"/>
+            </a:endParaRPr>
+          </a:p>
+        </p:txBody>
+      </p:sp>
+      <p:sp>
+        <p:nvSpPr>
+          <p:cNvPr id="703" name="TextBox 24"/>
+          <p:cNvSpPr txBox="1"/>
+          <p:nvPr/>
+        </p:nvSpPr>
+        <p:spPr>
+          <a:xfrm>
+            <a:off x="6096000" y="4343400"/>
+            <a:ext cx="5689600" cy="278130"/>
+          </a:xfrm>
+          <a:prstGeom prst="rect">
+            <a:avLst/>
+          </a:prstGeom>
+        </p:spPr>
+        <p:txBody>
+          <a:bodyPr wrap="square">
+            <a:spAutoFit/>
+          </a:bodyPr>
+          <a:lstStyle/>
+          <a:p>
+            <a:pPr algn="l">
+              <a:lnSpc>
+                <a:spcPct val="125000"/>
+              </a:lnSpc>
+              <a:spcAft>
+                <a:spcPts val="0"/>
+              </a:spcAft>
+            </a:pPr>
+            <a:r>
+              <a:rPr sz="980" b="0" i="0" cap="none">
+                <a:solidFill>
+                  <a:srgbClr val="55503F"/>
+                </a:solidFill>
+                <a:latin typeface="Georgia"/>
+              </a:rPr>
+              <a:t>Там, где есть узнаваемый человек, результат выше партийного среднего.</a:t>
+            </a:r>
+            <a:endParaRPr sz="980" b="0" i="0" cap="none">
+              <a:solidFill>
+                <a:srgbClr val="55503F"/>
+              </a:solidFill>
+              <a:latin typeface="Georgia"/>
+            </a:endParaRPr>
+          </a:p>
+        </p:txBody>
+      </p:sp>
+      <p:sp>
+        <p:nvSpPr>
+          <p:cNvPr id="704" name="Rectangle 25"/>
+          <p:cNvSpPr/>
+          <p:nvPr/>
+        </p:nvSpPr>
+        <p:spPr>
+          <a:xfrm>
+            <a:off x="812800" y="5029200"/>
+            <a:ext cx="10972800" cy="9525"/>
+          </a:xfrm>
+          <a:prstGeom prst="rect">
+            <a:avLst/>
+          </a:prstGeom>
+          <a:solidFill>
+            <a:srgbClr val="DED3B7"/>
+          </a:solidFill>
+          <a:ln>
+            <a:noFill/>
+          </a:ln>
+        </p:spPr>
+        <p:style>
+          <a:lnRef idx="2">
+            <a:schemeClr val="accent1">
+              <a:shade val="50000"/>
+            </a:schemeClr>
+          </a:lnRef>
+          <a:fillRef idx="1">
+            <a:schemeClr val="accent1"/>
+          </a:fillRef>
+          <a:effectRef idx="0">
+            <a:schemeClr val="accent1"/>
+          </a:effectRef>
+          <a:fontRef idx="minor">
+            <a:schemeClr val="lt1"/>
+          </a:fontRef>
+        </p:style>
+        <p:txBody>
+          <a:bodyPr anchor="ctr"/>
+          <a:lstStyle/>
+          <a:p/>
+        </p:txBody>
+      </p:sp>
+      <p:sp>
+        <p:nvSpPr>
+          <p:cNvPr id="705" name="TextBox 26"/>
+          <p:cNvSpPr txBox="1"/>
+          <p:nvPr/>
+        </p:nvSpPr>
+        <p:spPr>
+          <a:xfrm>
+            <a:off x="812800" y="5181600"/>
+            <a:ext cx="508000" cy="266700"/>
+          </a:xfrm>
+          <a:prstGeom prst="rect">
+            <a:avLst/>
+          </a:prstGeom>
+        </p:spPr>
+        <p:txBody>
+          <a:bodyPr wrap="square">
+            <a:spAutoFit/>
+          </a:bodyPr>
+          <a:lstStyle/>
+          <a:p>
+            <a:pPr algn="l">
+              <a:lnSpc>
+                <a:spcPct val="115000"/>
+              </a:lnSpc>
+              <a:spcAft>
+                <a:spcPts val="0"/>
+              </a:spcAft>
+            </a:pPr>
+            <a:r>
+              <a:rPr sz="1000" b="0" i="0" cap="none">
+                <a:solidFill>
+                  <a:srgbClr val="A82C1E"/>
+                </a:solidFill>
+                <a:latin typeface="Consolas"/>
+              </a:rPr>
+              <a:t>05</a:t>
+            </a:r>
+            <a:endParaRPr sz="1000" b="0" i="0" cap="none">
+              <a:solidFill>
+                <a:srgbClr val="A82C1E"/>
+              </a:solidFill>
+              <a:latin typeface="Consolas"/>
+            </a:endParaRPr>
+          </a:p>
+        </p:txBody>
+      </p:sp>
+      <p:sp>
+        <p:nvSpPr>
+          <p:cNvPr id="706" name="TextBox 27"/>
+          <p:cNvSpPr txBox="1"/>
+          <p:nvPr/>
+        </p:nvSpPr>
+        <p:spPr>
+          <a:xfrm>
+            <a:off x="1422400" y="5130800"/>
+            <a:ext cx="4572000" cy="310515"/>
+          </a:xfrm>
+          <a:prstGeom prst="rect">
+            <a:avLst/>
+          </a:prstGeom>
+        </p:spPr>
+        <p:txBody>
+          <a:bodyPr wrap="square">
+            <a:spAutoFit/>
+          </a:bodyPr>
+          <a:lstStyle/>
+          <a:p>
+            <a:pPr algn="l">
+              <a:lnSpc>
+                <a:spcPct val="115000"/>
+              </a:lnSpc>
+              <a:spcAft>
+                <a:spcPts val="0"/>
+              </a:spcAft>
+            </a:pPr>
+            <a:r>
+              <a:rPr sz="1250" b="0" i="0" cap="none">
+                <a:solidFill>
+                  <a:srgbClr val="1B1A18"/>
+                </a:solidFill>
+                <a:latin typeface="Bahnschrift SemiBold"/>
+              </a:rPr>
+              <a:t>Агитация не доходит до окраинной молодёжи</a:t>
+            </a:r>
+            <a:endParaRPr sz="1250" b="0" i="0" cap="none">
+              <a:solidFill>
+                <a:srgbClr val="1B1A18"/>
+              </a:solidFill>
+              <a:latin typeface="Bahnschrift SemiBold"/>
+            </a:endParaRPr>
+          </a:p>
+        </p:txBody>
+      </p:sp>
+      <p:sp>
+        <p:nvSpPr>
+          <p:cNvPr id="707" name="TextBox 28"/>
+          <p:cNvSpPr txBox="1"/>
+          <p:nvPr/>
+        </p:nvSpPr>
+        <p:spPr>
+          <a:xfrm>
+            <a:off x="6096000" y="5130800"/>
+            <a:ext cx="5689600" cy="278130"/>
+          </a:xfrm>
+          <a:prstGeom prst="rect">
+            <a:avLst/>
+          </a:prstGeom>
+        </p:spPr>
+        <p:txBody>
+          <a:bodyPr wrap="square">
+            <a:spAutoFit/>
+          </a:bodyPr>
+          <a:lstStyle/>
+          <a:p>
+            <a:pPr algn="l">
+              <a:lnSpc>
+                <a:spcPct val="125000"/>
+              </a:lnSpc>
+              <a:spcAft>
+                <a:spcPts val="0"/>
+              </a:spcAft>
+            </a:pPr>
+            <a:r>
+              <a:rPr sz="980" b="0" i="0" cap="none">
+                <a:solidFill>
+                  <a:srgbClr val="55503F"/>
+                </a:solidFill>
+                <a:latin typeface="Georgia"/>
+              </a:rPr>
+              <a:t>Газета и приёмная работают на ядро; районных ячеек и цифры почти нет.</a:t>
+            </a:r>
+            <a:endParaRPr sz="980" b="0" i="0" cap="none">
+              <a:solidFill>
+                <a:srgbClr val="55503F"/>
+              </a:solidFill>
+              <a:latin typeface="Georgia"/>
+            </a:endParaRPr>
+          </a:p>
+        </p:txBody>
+      </p:sp>
+    </p:spTree>
+  </p:cSld>
+  <p:clrMapOvr>
+    <a:masterClrMapping/>
+  </p:clrMapOvr>
+</p:sld>
+</file>
+
+<file path=ppt/slides/slide18.xml><?xml version="1.0" encoding="utf-8"?>
+<p:sld xmlns:a="http://schemas.openxmlformats.org/drawingml/2006/main" xmlns:r="http://schemas.openxmlformats.org/officeDocument/2006/relationships" xmlns:p="http://schemas.openxmlformats.org/presentationml/2006/main">
+  <p:cSld>
+    <p:bg>
+      <p:bgPr>
+        <a:solidFill>
+          <a:srgbClr val="E9E0CB"/>
+        </a:solidFill>
+        <a:effectLst/>
+      </p:bgPr>
+    </p:bg>
+    <p:spTree>
+      <p:nvGrpSpPr>
+        <p:cNvPr id="1" name=""/>
+        <p:cNvGrpSpPr/>
+        <p:nvPr/>
+      </p:nvGrpSpPr>
+      <p:grpSpPr>
+        <a:xfrm>
+          <a:off x="0" y="0"/>
+          <a:ext cx="0" cy="0"/>
+          <a:chOff x="0" y="0"/>
+          <a:chExt cx="0" cy="0"/>
+        </a:xfrm>
+      </p:grpSpPr>
+      <p:sp>
+        <p:nvSpPr>
+          <p:cNvPr id="708" name="Rectangle 1"/>
+          <p:cNvSpPr/>
+          <p:nvPr/>
+        </p:nvSpPr>
+        <p:spPr>
+          <a:xfrm>
+            <a:off x="0" y="0"/>
+            <a:ext cx="114300" cy="6858000"/>
+          </a:xfrm>
+          <a:prstGeom prst="rect">
+            <a:avLst/>
+          </a:prstGeom>
+          <a:solidFill>
+            <a:srgbClr val="A82C1E"/>
+          </a:solidFill>
+          <a:ln>
+            <a:noFill/>
+          </a:ln>
+        </p:spPr>
+        <p:style>
+          <a:lnRef idx="2">
+            <a:schemeClr val="accent1">
+              <a:shade val="50000"/>
+            </a:schemeClr>
+          </a:lnRef>
+          <a:fillRef idx="1">
+            <a:schemeClr val="accent1"/>
+          </a:fillRef>
+          <a:effectRef idx="0">
+            <a:schemeClr val="accent1"/>
+          </a:effectRef>
+          <a:fontRef idx="minor">
+            <a:schemeClr val="lt1"/>
+          </a:fontRef>
+        </p:style>
+        <p:txBody>
+          <a:bodyPr anchor="ctr"/>
+          <a:lstStyle/>
+          <a:p/>
+        </p:txBody>
+      </p:sp>
+      <p:sp>
+        <p:nvSpPr>
+          <p:cNvPr id="709" name="TextBox 2"/>
+          <p:cNvSpPr txBox="1"/>
+          <p:nvPr/>
+        </p:nvSpPr>
+        <p:spPr>
+          <a:xfrm>
+            <a:off x="812800" y="330200"/>
+            <a:ext cx="5334000" cy="257937"/>
+          </a:xfrm>
+          <a:prstGeom prst="rect">
+            <a:avLst/>
+          </a:prstGeom>
+        </p:spPr>
+        <p:txBody>
+          <a:bodyPr wrap="square">
+            <a:spAutoFit/>
+          </a:bodyPr>
+          <a:lstStyle/>
+          <a:p>
+            <a:pPr algn="l">
+              <a:lnSpc>
+                <a:spcPct val="115000"/>
+              </a:lnSpc>
+              <a:spcAft>
+                <a:spcPts val="0"/>
+              </a:spcAft>
+            </a:pPr>
+            <a:r>
+              <a:rPr sz="950" b="0" i="0" cap="none" spc="220">
+                <a:solidFill>
+                  <a:srgbClr val="A82C1E"/>
+                </a:solidFill>
+                <a:latin typeface="Consolas"/>
+              </a:rPr>
+              <a:t>17 / СЦЕНАРИИ</a:t>
+            </a:r>
+          </a:p>
+        </p:txBody>
+      </p:sp>
+      <p:sp>
+        <p:nvSpPr>
+          <p:cNvPr id="710" name="TextBox 3"/>
+          <p:cNvSpPr txBox="1"/>
+          <p:nvPr/>
+        </p:nvSpPr>
+        <p:spPr>
+          <a:xfrm>
+            <a:off x="7620000" y="330200"/>
+            <a:ext cx="3759200" cy="257937"/>
+          </a:xfrm>
+          <a:prstGeom prst="rect">
+            <a:avLst/>
+          </a:prstGeom>
+        </p:spPr>
+        <p:txBody>
+          <a:bodyPr wrap="square">
+            <a:spAutoFit/>
+          </a:bodyPr>
+          <a:lstStyle/>
+          <a:p>
+            <a:pPr algn="r">
+              <a:lnSpc>
+                <a:spcPct val="115000"/>
+              </a:lnSpc>
+              <a:spcAft>
+                <a:spcPts val="0"/>
+              </a:spcAft>
+            </a:pPr>
+            <a:r>
+              <a:rPr sz="950" b="0" i="0" cap="none" spc="140">
+                <a:solidFill>
+                  <a:srgbClr val="55503F"/>
+                </a:solidFill>
+                <a:latin typeface="Consolas"/>
+              </a:rPr>
+              <a:t>УЧАСТОК 765 · 2024–2026</a:t>
+            </a:r>
+            <a:endParaRPr sz="950" b="0" i="0" cap="none" spc="140">
+              <a:solidFill>
+                <a:srgbClr val="55503F"/>
+              </a:solidFill>
+              <a:latin typeface="Consolas"/>
+            </a:endParaRPr>
+          </a:p>
+        </p:txBody>
+      </p:sp>
+      <p:sp>
+        <p:nvSpPr>
+          <p:cNvPr id="711" name="TextBox 4"/>
+          <p:cNvSpPr txBox="1"/>
+          <p:nvPr/>
+        </p:nvSpPr>
+        <p:spPr>
+          <a:xfrm>
+            <a:off x="812800" y="635000"/>
+            <a:ext cx="10541000" cy="563880"/>
+          </a:xfrm>
+          <a:prstGeom prst="rect">
+            <a:avLst/>
+          </a:prstGeom>
+        </p:spPr>
+        <p:txBody>
+          <a:bodyPr wrap="square">
+            <a:spAutoFit/>
+          </a:bodyPr>
+          <a:lstStyle/>
+          <a:p>
+            <a:pPr algn="l">
+              <a:lnSpc>
+                <a:spcPct val="100000"/>
+              </a:lnSpc>
+              <a:spcAft>
+                <a:spcPts val="0"/>
+              </a:spcAft>
+            </a:pPr>
+            <a:r>
+              <a:rPr sz="3100" b="0" i="0" cap="none">
+                <a:solidFill>
+                  <a:srgbClr val="1B1A18"/>
+                </a:solidFill>
+                <a:latin typeface="Bahnschrift SemiBold"/>
+              </a:rPr>
+              <a:t>Что будет дальше: три траектории</a:t>
+            </a:r>
+            <a:endParaRPr sz="3100" b="0" i="0" cap="none">
+              <a:solidFill>
+                <a:srgbClr val="1B1A18"/>
+              </a:solidFill>
+              <a:latin typeface="Bahnschrift SemiBold"/>
+            </a:endParaRPr>
+          </a:p>
+        </p:txBody>
+      </p:sp>
+      <p:sp>
+        <p:nvSpPr>
+          <p:cNvPr id="712" name="Rectangle 5"/>
+          <p:cNvSpPr/>
+          <p:nvPr/>
+        </p:nvSpPr>
+        <p:spPr>
+          <a:xfrm>
+            <a:off x="812800" y="1422400"/>
+            <a:ext cx="10972800" cy="12700"/>
+          </a:xfrm>
+          <a:prstGeom prst="rect">
+            <a:avLst/>
+          </a:prstGeom>
+          <a:solidFill>
+            <a:srgbClr val="1B1A18"/>
+          </a:solidFill>
+          <a:ln>
+            <a:noFill/>
+          </a:ln>
+        </p:spPr>
+        <p:style>
+          <a:lnRef idx="2">
+            <a:schemeClr val="accent1">
+              <a:shade val="50000"/>
+            </a:schemeClr>
+          </a:lnRef>
+          <a:fillRef idx="1">
+            <a:schemeClr val="accent1"/>
+          </a:fillRef>
+          <a:effectRef idx="0">
+            <a:schemeClr val="accent1"/>
+          </a:effectRef>
+          <a:fontRef idx="minor">
+            <a:schemeClr val="lt1"/>
+          </a:fontRef>
+        </p:style>
+        <p:txBody>
+          <a:bodyPr anchor="ctr"/>
+          <a:lstStyle/>
+          <a:p/>
+        </p:txBody>
+      </p:sp>
+      <p:sp>
+        <p:nvSpPr>
+          <p:cNvPr id="713" name="Rectangle 6"/>
+          <p:cNvSpPr/>
+          <p:nvPr/>
+        </p:nvSpPr>
+        <p:spPr>
+          <a:xfrm>
+            <a:off x="812800" y="1384300"/>
+            <a:ext cx="1524000" cy="63500"/>
+          </a:xfrm>
+          <a:prstGeom prst="rect">
+            <a:avLst/>
+          </a:prstGeom>
+          <a:solidFill>
+            <a:srgbClr val="A82C1E"/>
+          </a:solidFill>
+          <a:ln>
+            <a:noFill/>
+          </a:ln>
+        </p:spPr>
+        <p:style>
+          <a:lnRef idx="2">
+            <a:schemeClr val="accent1">
+              <a:shade val="50000"/>
+            </a:schemeClr>
+          </a:lnRef>
+          <a:fillRef idx="1">
+            <a:schemeClr val="accent1"/>
+          </a:fillRef>
+          <a:effectRef idx="0">
+            <a:schemeClr val="accent1"/>
+          </a:effectRef>
+          <a:fontRef idx="minor">
+            <a:schemeClr val="lt1"/>
+          </a:fontRef>
+        </p:style>
+        <p:txBody>
+          <a:bodyPr anchor="ctr"/>
+          <a:lstStyle/>
+          <a:p/>
+        </p:txBody>
+      </p:sp>
+      <p:sp>
+        <p:nvSpPr>
+          <p:cNvPr id="715" name="TextBox 8"/>
+          <p:cNvSpPr txBox="1"/>
+          <p:nvPr/>
+        </p:nvSpPr>
+        <p:spPr>
+          <a:xfrm>
+            <a:off x="9652000" y="6400800"/>
+            <a:ext cx="2133600" cy="249174"/>
+          </a:xfrm>
+          <a:prstGeom prst="rect">
+            <a:avLst/>
+          </a:prstGeom>
+        </p:spPr>
+        <p:txBody>
+          <a:bodyPr wrap="square">
+            <a:spAutoFit/>
+          </a:bodyPr>
+          <a:lstStyle/>
+          <a:p>
+            <a:pPr algn="r">
+              <a:lnSpc>
+                <a:spcPct val="115000"/>
+              </a:lnSpc>
+              <a:spcAft>
+                <a:spcPts val="0"/>
+              </a:spcAft>
+            </a:pPr>
+            <a:r>
+              <a:rPr sz="900" b="0" i="0" cap="none" spc="140">
+                <a:solidFill>
+                  <a:srgbClr val="55503F"/>
+                </a:solidFill>
+                <a:latin typeface="Consolas"/>
+              </a:rPr>
+              <a:t>18 / 18</a:t>
             </a:r>
           </a:p>
         </p:txBody>
@@ -15771,7 +17032,7 @@
                 </a:solidFill>
                 <a:latin typeface="Consolas"/>
               </a:rPr>
-              <a:t>02 / 17</a:t>
+              <a:t>02 / 18</a:t>
             </a:r>
           </a:p>
         </p:txBody>
@@ -16951,7 +18212,7 @@
                 </a:solidFill>
                 <a:latin typeface="Consolas"/>
               </a:rPr>
-              <a:t>03 / 17</a:t>
+              <a:t>03 / 18</a:t>
             </a:r>
           </a:p>
         </p:txBody>
@@ -18137,7 +19398,7 @@
                 </a:solidFill>
                 <a:latin typeface="Consolas"/>
               </a:rPr>
-              <a:t>04 / 17</a:t>
+              <a:t>04 / 18</a:t>
             </a:r>
           </a:p>
         </p:txBody>
@@ -19671,7 +20932,7 @@
                 </a:solidFill>
                 <a:latin typeface="Consolas"/>
               </a:rPr>
-              <a:t>05 / 17</a:t>
+              <a:t>05 / 18</a:t>
             </a:r>
           </a:p>
         </p:txBody>
@@ -20866,7 +22127,7 @@
                 </a:solidFill>
                 <a:latin typeface="Consolas"/>
               </a:rPr>
-              <a:t>06 / 17</a:t>
+              <a:t>06 / 18</a:t>
             </a:r>
           </a:p>
         </p:txBody>
@@ -22036,7 +23297,7 @@
                 </a:solidFill>
                 <a:latin typeface="Consolas"/>
               </a:rPr>
-              <a:t>07 / 17</a:t>
+              <a:t>07 / 18</a:t>
             </a:r>
           </a:p>
         </p:txBody>
@@ -23727,7 +24988,7 @@
                 </a:solidFill>
                 <a:latin typeface="Consolas"/>
               </a:rPr>
-              <a:t>08 / 17</a:t>
+              <a:t>08 / 18</a:t>
             </a:r>
           </a:p>
         </p:txBody>
@@ -24854,7 +26115,7 @@
                 </a:solidFill>
                 <a:latin typeface="Consolas"/>
               </a:rPr>
-              <a:t>09 / 17</a:t>
+              <a:t>09 / 18</a:t>
             </a:r>
           </a:p>
         </p:txBody>

--- a/lecture-3/kprf-electorate.pptx
+++ b/lecture-3/kprf-electorate.pptx
@@ -1213,7 +1213,7 @@
           <a:p>
             <a:r>
               <a:rPr/>
-              <a:t>2024-й: губернаторские выборы мы отработали при явке 37,8%. КПРФ в бюллетене не было — и левый протест ушёл к другим.</a:t>
+              <a:t>2024-й: губернаторские выборы прошли при явке 37,8%. На участке кампания была тихой — агитации почти не было, а очередь к открытию — та же, что и в 2026-м.</a:t>
             </a:r>
           </a:p>
         </p:txBody>
@@ -21337,14 +21337,8 @@
                 </a:solidFill>
                 <a:latin typeface="Georgia"/>
               </a:rPr>
-              <a:t>«Коммунисты России» — лучший результат левых</a:t>
-            </a:r>
-            <a:endParaRPr sz="940" b="0" i="0" cap="none">
-              <a:solidFill>
-                <a:srgbClr val="55503F"/>
-              </a:solidFill>
-              <a:latin typeface="Georgia"/>
-            </a:endParaRPr>
+              <a:t>«Коммунисты России», губернаторские выборы</a:t>
+            </a:r>
           </a:p>
         </p:txBody>
       </p:sp>
@@ -21487,7 +21481,54 @@
       </p:sp>
       <p:sp>
         <p:nvSpPr>
-          <p:cNvPr id="419" name="Rectangle 21"/>
+          <p:cNvPr id="424" name="TextBox 26"/>
+          <p:cNvSpPr txBox="1"/>
+          <p:nvPr/>
+        </p:nvSpPr>
+        <p:spPr>
+          <a:xfrm>
+            <a:off x="812800" y="6070600"/>
+            <a:ext cx="10972800" cy="245669"/>
+          </a:xfrm>
+          <a:prstGeom prst="rect">
+            <a:avLst/>
+          </a:prstGeom>
+        </p:spPr>
+        <p:txBody>
+          <a:bodyPr wrap="square">
+            <a:spAutoFit/>
+          </a:bodyPr>
+          <a:lstStyle/>
+          <a:p>
+            <a:pPr algn="l">
+              <a:lnSpc>
+                <a:spcPct val="115000"/>
+              </a:lnSpc>
+              <a:spcAft>
+                <a:spcPts val="0"/>
+              </a:spcAft>
+            </a:pPr>
+            <a:r>
+              <a:rPr sz="880" b="0" i="1" cap="none">
+                <a:solidFill>
+                  <a:srgbClr val="55503F"/>
+                </a:solidFill>
+                <a:latin typeface="Georgia"/>
+              </a:rPr>
+              <a:t>Источники: СПбИК; ЦИК РФ, итоги выборов 6–8 сентября 2024 года.</a:t>
+            </a:r>
+            <a:endParaRPr sz="880" b="0" i="1" cap="none">
+              <a:solidFill>
+                <a:srgbClr val="55503F"/>
+              </a:solidFill>
+              <a:latin typeface="Georgia"/>
+            </a:endParaRPr>
+          </a:p>
+        </p:txBody>
+      </p:sp>
+      <p:sp>
+        <p:nvSpPr>
+          <p:cNvPr id="876" name="Rectangle 21"/>
           <p:cNvSpPr/>
           <p:nvPr/>
         </p:nvSpPr>
@@ -21530,14 +21571,14 @@
       </p:sp>
       <p:sp>
         <p:nvSpPr>
-          <p:cNvPr id="420" name="TextBox 22"/>
+          <p:cNvPr id="877" name="TextBox 22"/>
           <p:cNvSpPr txBox="1"/>
           <p:nvPr/>
         </p:nvSpPr>
         <p:spPr>
           <a:xfrm>
             <a:off x="1016000" y="3784600"/>
-            <a:ext cx="10541000" cy="371856"/>
+            <a:ext cx="10541000" cy="363093"/>
           </a:xfrm>
           <a:prstGeom prst="rect">
             <a:avLst/>
@@ -21558,15 +21599,15 @@
               </a:spcAft>
             </a:pPr>
             <a:r>
-              <a:rPr sz="1600" b="0" i="0" cap="none">
+              <a:rPr sz="1550" b="0" i="0">
                 <a:solidFill>
                   <a:srgbClr val="F0E8D6"/>
                 </a:solidFill>
                 <a:latin typeface="Bahnschrift SemiBold"/>
               </a:rPr>
-              <a:t>Кандидата от КПРФ в губернаторском бюллетене не было.</a:t>
-            </a:r>
-            <a:endParaRPr sz="1600" b="0" i="0" cap="none">
+              <a:t>Муниципальные выборы: 10 мандатов у КПРФ — против 68 у ЛДПР и 36 у «Новых людей».</a:t>
+            </a:r>
+            <a:endParaRPr sz="1550" b="0" i="0">
               <a:solidFill>
                 <a:srgbClr val="F0E8D6"/>
               </a:solidFill>
@@ -21577,43 +21618,43 @@
       </p:sp>
       <p:sp>
         <p:nvSpPr>
-          <p:cNvPr id="421" name="TextBox 23"/>
-          <p:cNvSpPr txBox="1"/>
-          <p:nvPr/>
-        </p:nvSpPr>
-        <p:spPr>
-          <a:xfrm>
-            <a:off x="1016000" y="4140200"/>
-            <a:ext cx="10541000" cy="309372"/>
-          </a:xfrm>
-          <a:prstGeom prst="rect">
-            <a:avLst/>
-          </a:prstGeom>
-        </p:spPr>
-        <p:txBody>
-          <a:bodyPr wrap="square">
-            <a:spAutoFit/>
-          </a:bodyPr>
-          <a:lstStyle/>
-          <a:p>
-            <a:pPr algn="l">
-              <a:lnSpc>
-                <a:spcPct val="130000"/>
-              </a:lnSpc>
-              <a:spcAft>
-                <a:spcPts val="0"/>
-              </a:spcAft>
-            </a:pPr>
-            <a:r>
-              <a:rPr sz="1100" b="0" i="0" cap="none">
+          <p:cNvPr id="878" name="TextBox 23"/>
+          <p:cNvSpPr txBox="1"/>
+          <p:nvPr/>
+        </p:nvSpPr>
+        <p:spPr>
+          <a:xfrm>
+            <a:off x="1016000" y="4165600"/>
+            <a:ext cx="10541000" cy="284226"/>
+          </a:xfrm>
+          <a:prstGeom prst="rect">
+            <a:avLst/>
+          </a:prstGeom>
+        </p:spPr>
+        <p:txBody>
+          <a:bodyPr wrap="square">
+            <a:spAutoFit/>
+          </a:bodyPr>
+          <a:lstStyle/>
+          <a:p>
+            <a:pPr algn="l">
+              <a:lnSpc>
+                <a:spcPct val="115000"/>
+              </a:lnSpc>
+              <a:spcAft>
+                <a:spcPts val="0"/>
+              </a:spcAft>
+            </a:pPr>
+            <a:r>
+              <a:rPr sz="1100" b="0" i="0">
                 <a:solidFill>
                   <a:srgbClr val="B9AE96"/>
                 </a:solidFill>
                 <a:latin typeface="Georgia"/>
               </a:rPr>
-              <a:t>Левый фланг представляли «Коммунисты России» (8,06%) и «Зелёные» (11,79%). Протест шёл мимо КПРФ.</a:t>
-            </a:r>
-            <a:endParaRPr sz="1100" b="0" i="0" cap="none">
+              <a:t>Явка — 31,73%. Именно на этом уровне видно, есть ли у партии районная организация.</a:t>
+            </a:r>
+            <a:endParaRPr sz="1100" b="0" i="0">
               <a:solidFill>
                 <a:srgbClr val="B9AE96"/>
               </a:solidFill>
@@ -21624,7 +21665,7 @@
       </p:sp>
       <p:sp>
         <p:nvSpPr>
-          <p:cNvPr id="422" name="TextBox 24"/>
+          <p:cNvPr id="879" name="TextBox 24"/>
           <p:cNvSpPr txBox="1"/>
           <p:nvPr/>
         </p:nvSpPr>
@@ -21652,15 +21693,15 @@
               </a:spcAft>
             </a:pPr>
             <a:r>
-              <a:rPr sz="900" b="0" i="0" cap="none" spc="200">
+              <a:rPr sz="900" b="0" i="0" spc="200">
                 <a:solidFill>
                   <a:srgbClr val="A82C1E"/>
                 </a:solidFill>
                 <a:latin typeface="Consolas"/>
               </a:rPr>
-              <a:t>МУНИЦИПАЛЬНЫЙ УРОВЕНЬ</a:t>
-            </a:r>
-            <a:endParaRPr sz="900" b="0" i="0" cap="none" spc="200">
+              <a:t>ИЗ ЖУРНАЛА УЧАСТКА</a:t>
+            </a:r>
+            <a:endParaRPr sz="900" b="0" i="0" spc="200">
               <a:solidFill>
                 <a:srgbClr val="A82C1E"/>
               </a:solidFill>
@@ -21671,117 +21712,45 @@
       </p:sp>
       <p:sp>
         <p:nvSpPr>
-          <p:cNvPr id="423" name="TextBox 25"/>
-          <p:cNvSpPr txBox="1"/>
-          <p:nvPr/>
-        </p:nvSpPr>
-        <p:spPr>
-          <a:xfrm>
-            <a:off x="812800" y="5283200"/>
-            <a:ext cx="10972800" cy="560832"/>
-          </a:xfrm>
-          <a:prstGeom prst="rect">
-            <a:avLst/>
-          </a:prstGeom>
-        </p:spPr>
-        <p:txBody>
-          <a:bodyPr wrap="square">
-            <a:spAutoFit/>
-          </a:bodyPr>
-          <a:lstStyle/>
-          <a:p>
-            <a:pPr algn="l">
-              <a:lnSpc>
-                <a:spcPct val="140000"/>
-              </a:lnSpc>
-              <a:spcAft>
-                <a:spcPts val="0"/>
-              </a:spcAft>
-            </a:pPr>
-            <a:r>
-              <a:rPr sz="1100" b="0" i="0" cap="none">
+          <p:cNvPr id="880" name="TextBox 25"/>
+          <p:cNvSpPr txBox="1"/>
+          <p:nvPr/>
+        </p:nvSpPr>
+        <p:spPr>
+          <a:xfrm>
+            <a:off x="812800" y="5257800"/>
+            <a:ext cx="10972800" cy="321869"/>
+          </a:xfrm>
+          <a:prstGeom prst="rect">
+            <a:avLst/>
+          </a:prstGeom>
+        </p:spPr>
+        <p:txBody>
+          <a:bodyPr wrap="square">
+            <a:spAutoFit/>
+          </a:bodyPr>
+          <a:lstStyle/>
+          <a:p>
+            <a:pPr algn="l">
+              <a:lnSpc>
+                <a:spcPct val="135000"/>
+              </a:lnSpc>
+              <a:spcAft>
+                <a:spcPts val="0"/>
+              </a:spcAft>
+            </a:pPr>
+            <a:r>
+              <a:rPr sz="1120" b="0" i="0">
                 <a:solidFill>
                   <a:srgbClr val="1B1A18"/>
                 </a:solidFill>
                 <a:latin typeface="Georgia"/>
               </a:rPr>
-              <a:t>Явка — 31,73%. КПРФ получила 10 мандатов по всему городу: у ЛДПР — 68, у «Новых людей» — 36.</a:t>
-            </a:r>
-            <a:endParaRPr sz="1100" b="0" i="0" cap="none">
+              <a:t>В 2024-м на участке было тихо: агитации почти не было, а очередь к открытию — та же, что и в 2026-м.</a:t>
+            </a:r>
+            <a:endParaRPr sz="1120" b="0" i="0">
               <a:solidFill>
                 <a:srgbClr val="1B1A18"/>
-              </a:solidFill>
-              <a:latin typeface="Georgia"/>
-            </a:endParaRPr>
-          </a:p>
-          <a:p>
-            <a:pPr algn="l">
-              <a:lnSpc>
-                <a:spcPct val="140000"/>
-              </a:lnSpc>
-              <a:spcAft>
-                <a:spcPts val="0"/>
-              </a:spcAft>
-            </a:pPr>
-            <a:r>
-              <a:rPr sz="1100" b="0" i="0" cap="none">
-                <a:solidFill>
-                  <a:srgbClr val="1B1A18"/>
-                </a:solidFill>
-                <a:latin typeface="Georgia"/>
-              </a:rPr>
-              <a:t>Это и есть цена слабой районной работы: там, где нужна ячейка, у партии — приёмная.</a:t>
-            </a:r>
-            <a:endParaRPr sz="1100" b="0" i="0" cap="none">
-              <a:solidFill>
-                <a:srgbClr val="1B1A18"/>
-              </a:solidFill>
-              <a:latin typeface="Georgia"/>
-            </a:endParaRPr>
-          </a:p>
-        </p:txBody>
-      </p:sp>
-      <p:sp>
-        <p:nvSpPr>
-          <p:cNvPr id="424" name="TextBox 26"/>
-          <p:cNvSpPr txBox="1"/>
-          <p:nvPr/>
-        </p:nvSpPr>
-        <p:spPr>
-          <a:xfrm>
-            <a:off x="812800" y="6070600"/>
-            <a:ext cx="10972800" cy="245669"/>
-          </a:xfrm>
-          <a:prstGeom prst="rect">
-            <a:avLst/>
-          </a:prstGeom>
-        </p:spPr>
-        <p:txBody>
-          <a:bodyPr wrap="square">
-            <a:spAutoFit/>
-          </a:bodyPr>
-          <a:lstStyle/>
-          <a:p>
-            <a:pPr algn="l">
-              <a:lnSpc>
-                <a:spcPct val="115000"/>
-              </a:lnSpc>
-              <a:spcAft>
-                <a:spcPts val="0"/>
-              </a:spcAft>
-            </a:pPr>
-            <a:r>
-              <a:rPr sz="880" b="0" i="1" cap="none">
-                <a:solidFill>
-                  <a:srgbClr val="55503F"/>
-                </a:solidFill>
-                <a:latin typeface="Georgia"/>
-              </a:rPr>
-              <a:t>Источники: СПбИК; ЦИК РФ, итоги выборов 6–8 сентября 2024 года.</a:t>
-            </a:r>
-            <a:endParaRPr sz="880" b="0" i="1" cap="none">
-              <a:solidFill>
-                <a:srgbClr val="55503F"/>
               </a:solidFill>
               <a:latin typeface="Georgia"/>
             </a:endParaRPr>
